--- a/docs/work_1.pptx
+++ b/docs/work_1.pptx
@@ -5,7 +5,7 @@
     <p:sldMasterId id="2147483673" r:id="rId1"/>
   </p:sldMasterIdLst>
   <p:notesMasterIdLst>
-    <p:notesMasterId r:id="rId14"/>
+    <p:notesMasterId r:id="rId27"/>
   </p:notesMasterIdLst>
   <p:sldIdLst>
     <p:sldId id="257" r:id="rId2"/>
@@ -20,6 +20,19 @@
     <p:sldId id="266" r:id="rId11"/>
     <p:sldId id="267" r:id="rId12"/>
     <p:sldId id="268" r:id="rId13"/>
+    <p:sldId id="269" r:id="rId14"/>
+    <p:sldId id="270" r:id="rId15"/>
+    <p:sldId id="271" r:id="rId16"/>
+    <p:sldId id="272" r:id="rId17"/>
+    <p:sldId id="273" r:id="rId18"/>
+    <p:sldId id="274" r:id="rId19"/>
+    <p:sldId id="275" r:id="rId20"/>
+    <p:sldId id="276" r:id="rId21"/>
+    <p:sldId id="277" r:id="rId22"/>
+    <p:sldId id="278" r:id="rId23"/>
+    <p:sldId id="280" r:id="rId24"/>
+    <p:sldId id="279" r:id="rId25"/>
+    <p:sldId id="281" r:id="rId26"/>
   </p:sldIdLst>
   <p:sldSz cx="12192000" cy="6858000"/>
   <p:notesSz cx="6858000" cy="9144000"/>
@@ -118,6 +131,11 @@
       </a:defRPr>
     </a:lvl9pPr>
   </p:defaultTextStyle>
+  <p:extLst>
+    <p:ext uri="{EFAFB233-063F-42B5-8137-9DF3F51BA10A}">
+      <p15:sldGuideLst xmlns:p15="http://schemas.microsoft.com/office/powerpoint/2012/main"/>
+    </p:ext>
+  </p:extLst>
 </p:presentation>
 </file>
 
@@ -203,7 +221,7 @@
           <a:p>
             <a:fld id="{7526D4C1-77E5-FD45-83F7-933CF44FBC75}" type="datetimeFigureOut">
               <a:rPr lang="fr-FR" smtClean="0"/>
-              <a:t>19/02/2025</a:t>
+              <a:t>13/03/2025</a:t>
             </a:fld>
             <a:endParaRPr lang="fr-FR"/>
           </a:p>
@@ -791,7 +809,7 @@
           <a:p>
             <a:fld id="{D1D1EADE-8E88-4C7C-8AC5-FB148DE4940E}" type="datetime1">
               <a:rPr lang="en-US" smtClean="0"/>
-              <a:t>2/19/25</a:t>
+              <a:t>3/13/25</a:t>
             </a:fld>
             <a:endParaRPr lang="en-US"/>
           </a:p>
@@ -991,7 +1009,7 @@
           <a:p>
             <a:fld id="{EC3C8B9C-477D-492A-96AD-1FC2CC997A73}" type="datetime1">
               <a:rPr lang="en-US" smtClean="0"/>
-              <a:t>2/19/25</a:t>
+              <a:t>3/13/25</a:t>
             </a:fld>
             <a:endParaRPr lang="en-US"/>
           </a:p>
@@ -1201,7 +1219,7 @@
           <a:p>
             <a:fld id="{42D3AED5-E26D-4E29-B1B3-7847B6779594}" type="datetime1">
               <a:rPr lang="en-US" smtClean="0"/>
-              <a:t>2/19/25</a:t>
+              <a:t>3/13/25</a:t>
             </a:fld>
             <a:endParaRPr lang="en-US"/>
           </a:p>
@@ -1401,7 +1419,7 @@
           <a:p>
             <a:fld id="{157B6794-849E-4626-908B-D15793550EFB}" type="datetime1">
               <a:rPr lang="en-US" smtClean="0"/>
-              <a:t>2/19/25</a:t>
+              <a:t>3/13/25</a:t>
             </a:fld>
             <a:endParaRPr lang="en-US"/>
           </a:p>
@@ -1677,7 +1695,7 @@
           <a:p>
             <a:fld id="{63DB64E7-5594-42A3-ADBF-E95A7ACEAD64}" type="datetime1">
               <a:rPr lang="en-US" smtClean="0"/>
-              <a:t>2/19/25</a:t>
+              <a:t>3/13/25</a:t>
             </a:fld>
             <a:endParaRPr lang="en-US"/>
           </a:p>
@@ -1950,7 +1968,7 @@
           <a:p>
             <a:fld id="{18462B0B-D248-4FFB-8695-AD7FA4B1284A}" type="datetime1">
               <a:rPr lang="en-US" smtClean="0"/>
-              <a:t>2/19/25</a:t>
+              <a:t>3/13/25</a:t>
             </a:fld>
             <a:endParaRPr lang="en-US"/>
           </a:p>
@@ -2373,7 +2391,7 @@
           <a:p>
             <a:fld id="{D0378EFB-9159-4510-B73F-4F0409ADE937}" type="datetime1">
               <a:rPr lang="en-US" smtClean="0"/>
-              <a:t>2/19/25</a:t>
+              <a:t>3/13/25</a:t>
             </a:fld>
             <a:endParaRPr lang="en-US"/>
           </a:p>
@@ -2515,7 +2533,7 @@
           <a:p>
             <a:fld id="{89BC9412-2452-4BED-A324-9D8C115361AD}" type="datetime1">
               <a:rPr lang="en-US" smtClean="0"/>
-              <a:t>2/19/25</a:t>
+              <a:t>3/13/25</a:t>
             </a:fld>
             <a:endParaRPr lang="en-US"/>
           </a:p>
@@ -2628,7 +2646,7 @@
           <a:p>
             <a:fld id="{F5318F62-D251-40E8-A23C-F4CFE9FEAB41}" type="datetime1">
               <a:rPr lang="en-US" smtClean="0"/>
-              <a:t>2/19/25</a:t>
+              <a:t>3/13/25</a:t>
             </a:fld>
             <a:endParaRPr lang="en-US"/>
           </a:p>
@@ -2941,7 +2959,7 @@
           <a:p>
             <a:fld id="{44F76144-149E-4874-93A5-554A0357CF82}" type="datetime1">
               <a:rPr lang="en-US" smtClean="0"/>
-              <a:t>2/19/25</a:t>
+              <a:t>3/13/25</a:t>
             </a:fld>
             <a:endParaRPr lang="en-US"/>
           </a:p>
@@ -3234,7 +3252,7 @@
           <a:p>
             <a:fld id="{50BA65D8-0540-4835-AE5C-25D29DBA01BE}" type="datetime1">
               <a:rPr lang="en-US" smtClean="0"/>
-              <a:t>2/19/25</a:t>
+              <a:t>3/13/25</a:t>
             </a:fld>
             <a:endParaRPr lang="en-US"/>
           </a:p>
@@ -3476,7 +3494,7 @@
           <a:p>
             <a:fld id="{E31BA835-12AC-4E8F-955A-EA3F4DE2791F}" type="datetime1">
               <a:rPr lang="en-US" smtClean="0"/>
-              <a:t>2/19/25</a:t>
+              <a:t>3/13/25</a:t>
             </a:fld>
             <a:endParaRPr lang="en-US"/>
           </a:p>
@@ -5895,6 +5913,2027 @@
 </p:sld>
 </file>
 
+<file path=ppt/slides/slide13.xml><?xml version="1.0" encoding="utf-8"?>
+<p:sld xmlns:a="http://schemas.openxmlformats.org/drawingml/2006/main" xmlns:r="http://schemas.openxmlformats.org/officeDocument/2006/relationships" xmlns:p="http://schemas.openxmlformats.org/presentationml/2006/main">
+  <p:cSld>
+    <p:spTree>
+      <p:nvGrpSpPr>
+        <p:cNvPr id="1" name=""/>
+        <p:cNvGrpSpPr/>
+        <p:nvPr/>
+      </p:nvGrpSpPr>
+      <p:grpSpPr>
+        <a:xfrm>
+          <a:off x="0" y="0"/>
+          <a:ext cx="0" cy="0"/>
+          <a:chOff x="0" y="0"/>
+          <a:chExt cx="0" cy="0"/>
+        </a:xfrm>
+      </p:grpSpPr>
+      <p:sp>
+        <p:nvSpPr>
+          <p:cNvPr id="2" name="ZoneTexte 1">
+            <a:extLst>
+              <a:ext uri="{FF2B5EF4-FFF2-40B4-BE49-F238E27FC236}">
+                <a16:creationId xmlns:a16="http://schemas.microsoft.com/office/drawing/2014/main" id="{A5CFF2C3-767E-AB12-2E9C-FBC8C70FDF9A}"/>
+              </a:ext>
+            </a:extLst>
+          </p:cNvPr>
+          <p:cNvSpPr txBox="1"/>
+          <p:nvPr/>
+        </p:nvSpPr>
+        <p:spPr>
+          <a:xfrm>
+            <a:off x="601579" y="252664"/>
+            <a:ext cx="2821157" cy="369332"/>
+          </a:xfrm>
+          <a:prstGeom prst="rect">
+            <a:avLst/>
+          </a:prstGeom>
+          <a:noFill/>
+        </p:spPr>
+        <p:txBody>
+          <a:bodyPr wrap="none" rtlCol="0">
+            <a:spAutoFit/>
+          </a:bodyPr>
+          <a:lstStyle/>
+          <a:p>
+            <a:r>
+              <a:rPr lang="en-US" b="1" noProof="0" dirty="0"/>
+              <a:t>Target Selection – 1 target</a:t>
+            </a:r>
+          </a:p>
+        </p:txBody>
+      </p:sp>
+      <p:pic>
+        <p:nvPicPr>
+          <p:cNvPr id="4" name="Image 3" descr="Une image contenant texte, Police, algèbre&#10;&#10;Le contenu généré par l’IA peut être incorrect.">
+            <a:extLst>
+              <a:ext uri="{FF2B5EF4-FFF2-40B4-BE49-F238E27FC236}">
+                <a16:creationId xmlns:a16="http://schemas.microsoft.com/office/drawing/2014/main" id="{E6751B20-F70C-8FD4-8B83-75F7BA767D61}"/>
+              </a:ext>
+            </a:extLst>
+          </p:cNvPr>
+          <p:cNvPicPr>
+            <a:picLocks noChangeAspect="1"/>
+          </p:cNvPicPr>
+          <p:nvPr/>
+        </p:nvPicPr>
+        <p:blipFill>
+          <a:blip r:embed="rId2"/>
+          <a:stretch>
+            <a:fillRect/>
+          </a:stretch>
+        </p:blipFill>
+        <p:spPr>
+          <a:xfrm>
+            <a:off x="137257" y="890954"/>
+            <a:ext cx="7772400" cy="1100156"/>
+          </a:xfrm>
+          <a:prstGeom prst="rect">
+            <a:avLst/>
+          </a:prstGeom>
+        </p:spPr>
+      </p:pic>
+      <p:pic>
+        <p:nvPicPr>
+          <p:cNvPr id="10" name="Image 9" descr="Une image contenant texte, reçu, Police, blanc&#10;&#10;Le contenu généré par l’IA peut être incorrect.">
+            <a:extLst>
+              <a:ext uri="{FF2B5EF4-FFF2-40B4-BE49-F238E27FC236}">
+                <a16:creationId xmlns:a16="http://schemas.microsoft.com/office/drawing/2014/main" id="{E12CCC3C-4905-A859-F509-255197D1EB41}"/>
+              </a:ext>
+            </a:extLst>
+          </p:cNvPr>
+          <p:cNvPicPr>
+            <a:picLocks noChangeAspect="1"/>
+          </p:cNvPicPr>
+          <p:nvPr/>
+        </p:nvPicPr>
+        <p:blipFill>
+          <a:blip r:embed="rId3"/>
+          <a:stretch>
+            <a:fillRect/>
+          </a:stretch>
+        </p:blipFill>
+        <p:spPr>
+          <a:xfrm>
+            <a:off x="220785" y="1991110"/>
+            <a:ext cx="1877646" cy="949740"/>
+          </a:xfrm>
+          <a:prstGeom prst="rect">
+            <a:avLst/>
+          </a:prstGeom>
+        </p:spPr>
+      </p:pic>
+      <p:pic>
+        <p:nvPicPr>
+          <p:cNvPr id="12" name="Image 11" descr="Une image contenant texte, Police, ligne, capture d’écran&#10;&#10;Le contenu généré par l’IA peut être incorrect.">
+            <a:extLst>
+              <a:ext uri="{FF2B5EF4-FFF2-40B4-BE49-F238E27FC236}">
+                <a16:creationId xmlns:a16="http://schemas.microsoft.com/office/drawing/2014/main" id="{57719A1A-4D90-6F3B-4786-76ECF81F869A}"/>
+              </a:ext>
+            </a:extLst>
+          </p:cNvPr>
+          <p:cNvPicPr>
+            <a:picLocks noChangeAspect="1"/>
+          </p:cNvPicPr>
+          <p:nvPr/>
+        </p:nvPicPr>
+        <p:blipFill>
+          <a:blip r:embed="rId4"/>
+          <a:stretch>
+            <a:fillRect/>
+          </a:stretch>
+        </p:blipFill>
+        <p:spPr>
+          <a:xfrm>
+            <a:off x="2181959" y="2160847"/>
+            <a:ext cx="2182473" cy="610265"/>
+          </a:xfrm>
+          <a:prstGeom prst="rect">
+            <a:avLst/>
+          </a:prstGeom>
+        </p:spPr>
+      </p:pic>
+      <p:pic>
+        <p:nvPicPr>
+          <p:cNvPr id="14" name="Image 13" descr="Une image contenant texte, reçu, capture d’écran, Police&#10;&#10;Le contenu généré par l’IA peut être incorrect.">
+            <a:extLst>
+              <a:ext uri="{FF2B5EF4-FFF2-40B4-BE49-F238E27FC236}">
+                <a16:creationId xmlns:a16="http://schemas.microsoft.com/office/drawing/2014/main" id="{EA15CA11-525E-50D9-AC93-B6243DE2AEBA}"/>
+              </a:ext>
+            </a:extLst>
+          </p:cNvPr>
+          <p:cNvPicPr>
+            <a:picLocks noChangeAspect="1"/>
+          </p:cNvPicPr>
+          <p:nvPr/>
+        </p:nvPicPr>
+        <p:blipFill>
+          <a:blip r:embed="rId5"/>
+          <a:stretch>
+            <a:fillRect/>
+          </a:stretch>
+        </p:blipFill>
+        <p:spPr>
+          <a:xfrm>
+            <a:off x="457201" y="2940850"/>
+            <a:ext cx="2860430" cy="1323483"/>
+          </a:xfrm>
+          <a:prstGeom prst="rect">
+            <a:avLst/>
+          </a:prstGeom>
+        </p:spPr>
+      </p:pic>
+      <p:pic>
+        <p:nvPicPr>
+          <p:cNvPr id="16" name="Image 15" descr="Une image contenant texte, capture d’écran&#10;&#10;Le contenu généré par l’IA peut être incorrect.">
+            <a:extLst>
+              <a:ext uri="{FF2B5EF4-FFF2-40B4-BE49-F238E27FC236}">
+                <a16:creationId xmlns:a16="http://schemas.microsoft.com/office/drawing/2014/main" id="{8EEABCFA-5878-8848-0D7A-577EB54BB7B5}"/>
+              </a:ext>
+            </a:extLst>
+          </p:cNvPr>
+          <p:cNvPicPr>
+            <a:picLocks noChangeAspect="1"/>
+          </p:cNvPicPr>
+          <p:nvPr/>
+        </p:nvPicPr>
+        <p:blipFill>
+          <a:blip r:embed="rId6"/>
+          <a:stretch>
+            <a:fillRect/>
+          </a:stretch>
+        </p:blipFill>
+        <p:spPr>
+          <a:xfrm>
+            <a:off x="4447960" y="1594339"/>
+            <a:ext cx="3966993" cy="4372708"/>
+          </a:xfrm>
+          <a:prstGeom prst="rect">
+            <a:avLst/>
+          </a:prstGeom>
+        </p:spPr>
+      </p:pic>
+      <p:pic>
+        <p:nvPicPr>
+          <p:cNvPr id="18" name="Image 17" descr="Une image contenant texte, capture d’écran, Caractère coloré, diagramme&#10;&#10;Le contenu généré par l’IA peut être incorrect.">
+            <a:extLst>
+              <a:ext uri="{FF2B5EF4-FFF2-40B4-BE49-F238E27FC236}">
+                <a16:creationId xmlns:a16="http://schemas.microsoft.com/office/drawing/2014/main" id="{297C8C01-9682-93A0-1F2E-5F98353F109A}"/>
+              </a:ext>
+            </a:extLst>
+          </p:cNvPr>
+          <p:cNvPicPr>
+            <a:picLocks noChangeAspect="1"/>
+          </p:cNvPicPr>
+          <p:nvPr/>
+        </p:nvPicPr>
+        <p:blipFill>
+          <a:blip r:embed="rId7"/>
+          <a:stretch>
+            <a:fillRect/>
+          </a:stretch>
+        </p:blipFill>
+        <p:spPr>
+          <a:xfrm>
+            <a:off x="7993184" y="1547446"/>
+            <a:ext cx="3741615" cy="4424517"/>
+          </a:xfrm>
+          <a:prstGeom prst="rect">
+            <a:avLst/>
+          </a:prstGeom>
+        </p:spPr>
+      </p:pic>
+      <p:pic>
+        <p:nvPicPr>
+          <p:cNvPr id="20" name="Image 19" descr="Une image contenant texte, reçu, capture d’écran, Police&#10;&#10;Le contenu généré par l’IA peut être incorrect.">
+            <a:extLst>
+              <a:ext uri="{FF2B5EF4-FFF2-40B4-BE49-F238E27FC236}">
+                <a16:creationId xmlns:a16="http://schemas.microsoft.com/office/drawing/2014/main" id="{4F9DD1BF-051F-0E61-4B58-32BC73C65BA4}"/>
+              </a:ext>
+            </a:extLst>
+          </p:cNvPr>
+          <p:cNvPicPr>
+            <a:picLocks noChangeAspect="1"/>
+          </p:cNvPicPr>
+          <p:nvPr/>
+        </p:nvPicPr>
+        <p:blipFill>
+          <a:blip r:embed="rId8"/>
+          <a:stretch>
+            <a:fillRect/>
+          </a:stretch>
+        </p:blipFill>
+        <p:spPr>
+          <a:xfrm>
+            <a:off x="329617" y="4434071"/>
+            <a:ext cx="3093119" cy="1440378"/>
+          </a:xfrm>
+          <a:prstGeom prst="rect">
+            <a:avLst/>
+          </a:prstGeom>
+        </p:spPr>
+      </p:pic>
+    </p:spTree>
+    <p:extLst>
+      <p:ext uri="{BB962C8B-B14F-4D97-AF65-F5344CB8AC3E}">
+        <p14:creationId xmlns:p14="http://schemas.microsoft.com/office/powerpoint/2010/main" val="2366426342"/>
+      </p:ext>
+    </p:extLst>
+  </p:cSld>
+  <p:clrMapOvr>
+    <a:masterClrMapping/>
+  </p:clrMapOvr>
+</p:sld>
+</file>
+
+<file path=ppt/slides/slide14.xml><?xml version="1.0" encoding="utf-8"?>
+<p:sld xmlns:a="http://schemas.openxmlformats.org/drawingml/2006/main" xmlns:r="http://schemas.openxmlformats.org/officeDocument/2006/relationships" xmlns:p="http://schemas.openxmlformats.org/presentationml/2006/main">
+  <p:cSld>
+    <p:spTree>
+      <p:nvGrpSpPr>
+        <p:cNvPr id="1" name="">
+          <a:extLst>
+            <a:ext uri="{FF2B5EF4-FFF2-40B4-BE49-F238E27FC236}">
+              <a16:creationId xmlns:a16="http://schemas.microsoft.com/office/drawing/2014/main" id="{41417B53-AA9B-98C9-24B1-C7F38AD33AF1}"/>
+            </a:ext>
+          </a:extLst>
+        </p:cNvPr>
+        <p:cNvGrpSpPr/>
+        <p:nvPr/>
+      </p:nvGrpSpPr>
+      <p:grpSpPr>
+        <a:xfrm>
+          <a:off x="0" y="0"/>
+          <a:ext cx="0" cy="0"/>
+          <a:chOff x="0" y="0"/>
+          <a:chExt cx="0" cy="0"/>
+        </a:xfrm>
+      </p:grpSpPr>
+      <p:sp>
+        <p:nvSpPr>
+          <p:cNvPr id="2" name="ZoneTexte 1">
+            <a:extLst>
+              <a:ext uri="{FF2B5EF4-FFF2-40B4-BE49-F238E27FC236}">
+                <a16:creationId xmlns:a16="http://schemas.microsoft.com/office/drawing/2014/main" id="{6A666792-A8EE-CFDC-FA29-B0E1AC233679}"/>
+              </a:ext>
+            </a:extLst>
+          </p:cNvPr>
+          <p:cNvSpPr txBox="1"/>
+          <p:nvPr/>
+        </p:nvSpPr>
+        <p:spPr>
+          <a:xfrm>
+            <a:off x="601579" y="252664"/>
+            <a:ext cx="2821157" cy="369332"/>
+          </a:xfrm>
+          <a:prstGeom prst="rect">
+            <a:avLst/>
+          </a:prstGeom>
+          <a:noFill/>
+        </p:spPr>
+        <p:txBody>
+          <a:bodyPr wrap="none" rtlCol="0">
+            <a:spAutoFit/>
+          </a:bodyPr>
+          <a:lstStyle/>
+          <a:p>
+            <a:r>
+              <a:rPr lang="en-US" b="1" noProof="0" dirty="0"/>
+              <a:t>Target Selection – 1 target</a:t>
+            </a:r>
+          </a:p>
+        </p:txBody>
+      </p:sp>
+      <p:pic>
+        <p:nvPicPr>
+          <p:cNvPr id="4" name="Image 3" descr="Une image contenant texte, Police, algèbre&#10;&#10;Le contenu généré par l’IA peut être incorrect.">
+            <a:extLst>
+              <a:ext uri="{FF2B5EF4-FFF2-40B4-BE49-F238E27FC236}">
+                <a16:creationId xmlns:a16="http://schemas.microsoft.com/office/drawing/2014/main" id="{3D17012C-1191-8832-2289-72111441F67F}"/>
+              </a:ext>
+            </a:extLst>
+          </p:cNvPr>
+          <p:cNvPicPr>
+            <a:picLocks noChangeAspect="1"/>
+          </p:cNvPicPr>
+          <p:nvPr/>
+        </p:nvPicPr>
+        <p:blipFill>
+          <a:blip r:embed="rId2"/>
+          <a:stretch>
+            <a:fillRect/>
+          </a:stretch>
+        </p:blipFill>
+        <p:spPr>
+          <a:xfrm>
+            <a:off x="188348" y="768394"/>
+            <a:ext cx="5010693" cy="709246"/>
+          </a:xfrm>
+          <a:prstGeom prst="rect">
+            <a:avLst/>
+          </a:prstGeom>
+        </p:spPr>
+      </p:pic>
+      <p:pic>
+        <p:nvPicPr>
+          <p:cNvPr id="6" name="Image 5" descr="Une image contenant texte, Police, reçu, blanc&#10;&#10;Le contenu généré par l’IA peut être incorrect.">
+            <a:extLst>
+              <a:ext uri="{FF2B5EF4-FFF2-40B4-BE49-F238E27FC236}">
+                <a16:creationId xmlns:a16="http://schemas.microsoft.com/office/drawing/2014/main" id="{5DBCDB0C-D12F-9709-5E11-7EB863E1ED6B}"/>
+              </a:ext>
+            </a:extLst>
+          </p:cNvPr>
+          <p:cNvPicPr>
+            <a:picLocks noChangeAspect="1"/>
+          </p:cNvPicPr>
+          <p:nvPr/>
+        </p:nvPicPr>
+        <p:blipFill>
+          <a:blip r:embed="rId3"/>
+          <a:stretch>
+            <a:fillRect/>
+          </a:stretch>
+        </p:blipFill>
+        <p:spPr>
+          <a:xfrm>
+            <a:off x="188348" y="1462916"/>
+            <a:ext cx="2167090" cy="843408"/>
+          </a:xfrm>
+          <a:prstGeom prst="rect">
+            <a:avLst/>
+          </a:prstGeom>
+        </p:spPr>
+      </p:pic>
+      <p:pic>
+        <p:nvPicPr>
+          <p:cNvPr id="5" name="Image 4" descr="Une image contenant texte, Police, ligne, nombre&#10;&#10;Le contenu généré par l’IA peut être incorrect.">
+            <a:extLst>
+              <a:ext uri="{FF2B5EF4-FFF2-40B4-BE49-F238E27FC236}">
+                <a16:creationId xmlns:a16="http://schemas.microsoft.com/office/drawing/2014/main" id="{FDE1334D-D03D-4696-1A91-C1DB008D83B5}"/>
+              </a:ext>
+            </a:extLst>
+          </p:cNvPr>
+          <p:cNvPicPr>
+            <a:picLocks noChangeAspect="1"/>
+          </p:cNvPicPr>
+          <p:nvPr/>
+        </p:nvPicPr>
+        <p:blipFill>
+          <a:blip r:embed="rId4"/>
+          <a:stretch>
+            <a:fillRect/>
+          </a:stretch>
+        </p:blipFill>
+        <p:spPr>
+          <a:xfrm>
+            <a:off x="336148" y="2360242"/>
+            <a:ext cx="2679700" cy="812800"/>
+          </a:xfrm>
+          <a:prstGeom prst="rect">
+            <a:avLst/>
+          </a:prstGeom>
+        </p:spPr>
+      </p:pic>
+      <p:pic>
+        <p:nvPicPr>
+          <p:cNvPr id="8" name="Image 7" descr="Une image contenant texte, capture d’écran, reçu, Police&#10;&#10;Le contenu généré par l’IA peut être incorrect.">
+            <a:extLst>
+              <a:ext uri="{FF2B5EF4-FFF2-40B4-BE49-F238E27FC236}">
+                <a16:creationId xmlns:a16="http://schemas.microsoft.com/office/drawing/2014/main" id="{D9A019CD-2AAB-A9F1-1021-193EAE401E54}"/>
+              </a:ext>
+            </a:extLst>
+          </p:cNvPr>
+          <p:cNvPicPr>
+            <a:picLocks noChangeAspect="1"/>
+          </p:cNvPicPr>
+          <p:nvPr/>
+        </p:nvPicPr>
+        <p:blipFill>
+          <a:blip r:embed="rId5"/>
+          <a:stretch>
+            <a:fillRect/>
+          </a:stretch>
+        </p:blipFill>
+        <p:spPr>
+          <a:xfrm>
+            <a:off x="336148" y="3226960"/>
+            <a:ext cx="3234790" cy="1431323"/>
+          </a:xfrm>
+          <a:prstGeom prst="rect">
+            <a:avLst/>
+          </a:prstGeom>
+        </p:spPr>
+      </p:pic>
+      <p:pic>
+        <p:nvPicPr>
+          <p:cNvPr id="10" name="Image 9" descr="Une image contenant texte, reçu, Police, capture d’écran&#10;&#10;Le contenu généré par l’IA peut être incorrect.">
+            <a:extLst>
+              <a:ext uri="{FF2B5EF4-FFF2-40B4-BE49-F238E27FC236}">
+                <a16:creationId xmlns:a16="http://schemas.microsoft.com/office/drawing/2014/main" id="{0AAF8A8B-C86F-3370-31D1-61EE6AAF8A64}"/>
+              </a:ext>
+            </a:extLst>
+          </p:cNvPr>
+          <p:cNvPicPr>
+            <a:picLocks noChangeAspect="1"/>
+          </p:cNvPicPr>
+          <p:nvPr/>
+        </p:nvPicPr>
+        <p:blipFill>
+          <a:blip r:embed="rId6"/>
+          <a:stretch>
+            <a:fillRect/>
+          </a:stretch>
+        </p:blipFill>
+        <p:spPr>
+          <a:xfrm>
+            <a:off x="246714" y="4658283"/>
+            <a:ext cx="3386790" cy="1431322"/>
+          </a:xfrm>
+          <a:prstGeom prst="rect">
+            <a:avLst/>
+          </a:prstGeom>
+        </p:spPr>
+      </p:pic>
+      <p:pic>
+        <p:nvPicPr>
+          <p:cNvPr id="12" name="Image 11" descr="Une image contenant texte, capture d’écran, diagramme, ligne&#10;&#10;Le contenu généré par l’IA peut être incorrect.">
+            <a:extLst>
+              <a:ext uri="{FF2B5EF4-FFF2-40B4-BE49-F238E27FC236}">
+                <a16:creationId xmlns:a16="http://schemas.microsoft.com/office/drawing/2014/main" id="{6BD1D823-B0CC-4B53-6728-DB22A59F00FB}"/>
+              </a:ext>
+            </a:extLst>
+          </p:cNvPr>
+          <p:cNvPicPr>
+            <a:picLocks noChangeAspect="1"/>
+          </p:cNvPicPr>
+          <p:nvPr/>
+        </p:nvPicPr>
+        <p:blipFill>
+          <a:blip r:embed="rId7"/>
+          <a:stretch>
+            <a:fillRect/>
+          </a:stretch>
+        </p:blipFill>
+        <p:spPr>
+          <a:xfrm>
+            <a:off x="3863941" y="1338030"/>
+            <a:ext cx="4093665" cy="4751575"/>
+          </a:xfrm>
+          <a:prstGeom prst="rect">
+            <a:avLst/>
+          </a:prstGeom>
+        </p:spPr>
+      </p:pic>
+      <p:pic>
+        <p:nvPicPr>
+          <p:cNvPr id="14" name="Image 13" descr="Une image contenant texte, capture d’écran, Police, conception&#10;&#10;Le contenu généré par l’IA peut être incorrect.">
+            <a:extLst>
+              <a:ext uri="{FF2B5EF4-FFF2-40B4-BE49-F238E27FC236}">
+                <a16:creationId xmlns:a16="http://schemas.microsoft.com/office/drawing/2014/main" id="{8553C511-FD9B-AD3F-4798-888AD3A25918}"/>
+              </a:ext>
+            </a:extLst>
+          </p:cNvPr>
+          <p:cNvPicPr>
+            <a:picLocks noChangeAspect="1"/>
+          </p:cNvPicPr>
+          <p:nvPr/>
+        </p:nvPicPr>
+        <p:blipFill>
+          <a:blip r:embed="rId8"/>
+          <a:stretch>
+            <a:fillRect/>
+          </a:stretch>
+        </p:blipFill>
+        <p:spPr>
+          <a:xfrm>
+            <a:off x="7711605" y="1251727"/>
+            <a:ext cx="4087074" cy="4611965"/>
+          </a:xfrm>
+          <a:prstGeom prst="rect">
+            <a:avLst/>
+          </a:prstGeom>
+        </p:spPr>
+      </p:pic>
+    </p:spTree>
+    <p:extLst>
+      <p:ext uri="{BB962C8B-B14F-4D97-AF65-F5344CB8AC3E}">
+        <p14:creationId xmlns:p14="http://schemas.microsoft.com/office/powerpoint/2010/main" val="3114509963"/>
+      </p:ext>
+    </p:extLst>
+  </p:cSld>
+  <p:clrMapOvr>
+    <a:masterClrMapping/>
+  </p:clrMapOvr>
+</p:sld>
+</file>
+
+<file path=ppt/slides/slide15.xml><?xml version="1.0" encoding="utf-8"?>
+<p:sld xmlns:a="http://schemas.openxmlformats.org/drawingml/2006/main" xmlns:r="http://schemas.openxmlformats.org/officeDocument/2006/relationships" xmlns:p="http://schemas.openxmlformats.org/presentationml/2006/main">
+  <p:cSld>
+    <p:spTree>
+      <p:nvGrpSpPr>
+        <p:cNvPr id="1" name="">
+          <a:extLst>
+            <a:ext uri="{FF2B5EF4-FFF2-40B4-BE49-F238E27FC236}">
+              <a16:creationId xmlns:a16="http://schemas.microsoft.com/office/drawing/2014/main" id="{6CE286A4-6E12-49B5-6192-3C1A4EAC6574}"/>
+            </a:ext>
+          </a:extLst>
+        </p:cNvPr>
+        <p:cNvGrpSpPr/>
+        <p:nvPr/>
+      </p:nvGrpSpPr>
+      <p:grpSpPr>
+        <a:xfrm>
+          <a:off x="0" y="0"/>
+          <a:ext cx="0" cy="0"/>
+          <a:chOff x="0" y="0"/>
+          <a:chExt cx="0" cy="0"/>
+        </a:xfrm>
+      </p:grpSpPr>
+      <p:sp>
+        <p:nvSpPr>
+          <p:cNvPr id="2" name="ZoneTexte 1">
+            <a:extLst>
+              <a:ext uri="{FF2B5EF4-FFF2-40B4-BE49-F238E27FC236}">
+                <a16:creationId xmlns:a16="http://schemas.microsoft.com/office/drawing/2014/main" id="{C442DF8D-8E68-DBB3-15F3-BDB1A98A025F}"/>
+              </a:ext>
+            </a:extLst>
+          </p:cNvPr>
+          <p:cNvSpPr txBox="1"/>
+          <p:nvPr/>
+        </p:nvSpPr>
+        <p:spPr>
+          <a:xfrm>
+            <a:off x="601579" y="252664"/>
+            <a:ext cx="6426311" cy="369332"/>
+          </a:xfrm>
+          <a:prstGeom prst="rect">
+            <a:avLst/>
+          </a:prstGeom>
+          <a:noFill/>
+        </p:spPr>
+        <p:txBody>
+          <a:bodyPr wrap="none" rtlCol="0">
+            <a:spAutoFit/>
+          </a:bodyPr>
+          <a:lstStyle/>
+          <a:p>
+            <a:r>
+              <a:rPr lang="en-US" b="1" noProof="0" dirty="0"/>
+              <a:t>Target Selection – target (</a:t>
+            </a:r>
+            <a:r>
+              <a:rPr lang="en-US" sz="1800" b="1" dirty="0"/>
+              <a:t>not diabetes/</a:t>
+            </a:r>
+            <a:r>
+              <a:rPr lang="en-US" sz="1800" b="1" noProof="0" dirty="0"/>
+              <a:t> prediabetes/</a:t>
+            </a:r>
+            <a:r>
+              <a:rPr lang="en-US" sz="1800" b="1" dirty="0"/>
+              <a:t> diabetes)</a:t>
+            </a:r>
+            <a:endParaRPr lang="en-US" b="1" noProof="0" dirty="0"/>
+          </a:p>
+        </p:txBody>
+      </p:sp>
+      <p:sp>
+        <p:nvSpPr>
+          <p:cNvPr id="3" name="ZoneTexte 2">
+            <a:extLst>
+              <a:ext uri="{FF2B5EF4-FFF2-40B4-BE49-F238E27FC236}">
+                <a16:creationId xmlns:a16="http://schemas.microsoft.com/office/drawing/2014/main" id="{4FA602D8-316D-0E7A-90EA-5B2AF8915482}"/>
+              </a:ext>
+            </a:extLst>
+          </p:cNvPr>
+          <p:cNvSpPr txBox="1"/>
+          <p:nvPr/>
+        </p:nvSpPr>
+        <p:spPr>
+          <a:xfrm>
+            <a:off x="347500" y="909629"/>
+            <a:ext cx="1409360" cy="954107"/>
+          </a:xfrm>
+          <a:prstGeom prst="rect">
+            <a:avLst/>
+          </a:prstGeom>
+          <a:noFill/>
+        </p:spPr>
+        <p:txBody>
+          <a:bodyPr wrap="none" rtlCol="0">
+            <a:spAutoFit/>
+          </a:bodyPr>
+          <a:lstStyle/>
+          <a:p>
+            <a:r>
+              <a:rPr lang="en-US" sz="1400" b="1" noProof="0" dirty="0"/>
+              <a:t>Target :</a:t>
+            </a:r>
+          </a:p>
+          <a:p>
+            <a:r>
+              <a:rPr lang="en-US" sz="1400" b="1" dirty="0"/>
+              <a:t>0 – not diabetes</a:t>
+            </a:r>
+          </a:p>
+          <a:p>
+            <a:r>
+              <a:rPr lang="en-US" sz="1400" b="1" noProof="0" dirty="0"/>
+              <a:t>1 – prediabetes</a:t>
+            </a:r>
+          </a:p>
+          <a:p>
+            <a:r>
+              <a:rPr lang="en-US" sz="1400" b="1" dirty="0"/>
+              <a:t>2 - diabetes</a:t>
+            </a:r>
+            <a:endParaRPr lang="en-US" sz="1400" b="1" noProof="0" dirty="0"/>
+          </a:p>
+        </p:txBody>
+      </p:sp>
+      <p:pic>
+        <p:nvPicPr>
+          <p:cNvPr id="9" name="Image 8" descr="Une image contenant texte, reçu, Police, blanc&#10;&#10;Le contenu généré par l’IA peut être incorrect.">
+            <a:extLst>
+              <a:ext uri="{FF2B5EF4-FFF2-40B4-BE49-F238E27FC236}">
+                <a16:creationId xmlns:a16="http://schemas.microsoft.com/office/drawing/2014/main" id="{87EF9DD1-4BFF-222A-BF26-8B94DA5126D1}"/>
+              </a:ext>
+            </a:extLst>
+          </p:cNvPr>
+          <p:cNvPicPr>
+            <a:picLocks noChangeAspect="1"/>
+          </p:cNvPicPr>
+          <p:nvPr/>
+        </p:nvPicPr>
+        <p:blipFill>
+          <a:blip r:embed="rId2"/>
+          <a:stretch>
+            <a:fillRect/>
+          </a:stretch>
+        </p:blipFill>
+        <p:spPr>
+          <a:xfrm>
+            <a:off x="265438" y="1957521"/>
+            <a:ext cx="2311400" cy="939800"/>
+          </a:xfrm>
+          <a:prstGeom prst="rect">
+            <a:avLst/>
+          </a:prstGeom>
+        </p:spPr>
+      </p:pic>
+      <p:pic>
+        <p:nvPicPr>
+          <p:cNvPr id="13" name="Image 12">
+            <a:extLst>
+              <a:ext uri="{FF2B5EF4-FFF2-40B4-BE49-F238E27FC236}">
+                <a16:creationId xmlns:a16="http://schemas.microsoft.com/office/drawing/2014/main" id="{E8FFB24C-5786-9504-52EF-FCBCB40543BF}"/>
+              </a:ext>
+            </a:extLst>
+          </p:cNvPr>
+          <p:cNvPicPr>
+            <a:picLocks noChangeAspect="1"/>
+          </p:cNvPicPr>
+          <p:nvPr/>
+        </p:nvPicPr>
+        <p:blipFill>
+          <a:blip r:embed="rId3"/>
+          <a:stretch>
+            <a:fillRect/>
+          </a:stretch>
+        </p:blipFill>
+        <p:spPr>
+          <a:xfrm>
+            <a:off x="1907526" y="1703521"/>
+            <a:ext cx="2336800" cy="723900"/>
+          </a:xfrm>
+          <a:prstGeom prst="rect">
+            <a:avLst/>
+          </a:prstGeom>
+        </p:spPr>
+      </p:pic>
+      <p:pic>
+        <p:nvPicPr>
+          <p:cNvPr id="16" name="Image 15" descr="Une image contenant texte, capture d’écran, Police, reçu&#10;&#10;Le contenu généré par l’IA peut être incorrect.">
+            <a:extLst>
+              <a:ext uri="{FF2B5EF4-FFF2-40B4-BE49-F238E27FC236}">
+                <a16:creationId xmlns:a16="http://schemas.microsoft.com/office/drawing/2014/main" id="{E116B6DB-E215-708C-F8DA-472CACEAC3E5}"/>
+              </a:ext>
+            </a:extLst>
+          </p:cNvPr>
+          <p:cNvPicPr>
+            <a:picLocks noChangeAspect="1"/>
+          </p:cNvPicPr>
+          <p:nvPr/>
+        </p:nvPicPr>
+        <p:blipFill>
+          <a:blip r:embed="rId4"/>
+          <a:stretch>
+            <a:fillRect/>
+          </a:stretch>
+        </p:blipFill>
+        <p:spPr>
+          <a:xfrm>
+            <a:off x="265438" y="2897322"/>
+            <a:ext cx="3157298" cy="1542148"/>
+          </a:xfrm>
+          <a:prstGeom prst="rect">
+            <a:avLst/>
+          </a:prstGeom>
+        </p:spPr>
+      </p:pic>
+      <p:pic>
+        <p:nvPicPr>
+          <p:cNvPr id="18" name="Image 17" descr="Une image contenant texte, capture d’écran, Police, reçu&#10;&#10;Le contenu généré par l’IA peut être incorrect.">
+            <a:extLst>
+              <a:ext uri="{FF2B5EF4-FFF2-40B4-BE49-F238E27FC236}">
+                <a16:creationId xmlns:a16="http://schemas.microsoft.com/office/drawing/2014/main" id="{27C9A703-0825-2B0B-2039-5F7ABB1772E9}"/>
+              </a:ext>
+            </a:extLst>
+          </p:cNvPr>
+          <p:cNvPicPr>
+            <a:picLocks noChangeAspect="1"/>
+          </p:cNvPicPr>
+          <p:nvPr/>
+        </p:nvPicPr>
+        <p:blipFill>
+          <a:blip r:embed="rId5"/>
+          <a:stretch>
+            <a:fillRect/>
+          </a:stretch>
+        </p:blipFill>
+        <p:spPr>
+          <a:xfrm>
+            <a:off x="0" y="4430580"/>
+            <a:ext cx="3422736" cy="1587356"/>
+          </a:xfrm>
+          <a:prstGeom prst="rect">
+            <a:avLst/>
+          </a:prstGeom>
+        </p:spPr>
+      </p:pic>
+      <p:pic>
+        <p:nvPicPr>
+          <p:cNvPr id="20" name="Image 19" descr="Une image contenant texte, capture d’écran&#10;&#10;Le contenu généré par l’IA peut être incorrect.">
+            <a:extLst>
+              <a:ext uri="{FF2B5EF4-FFF2-40B4-BE49-F238E27FC236}">
+                <a16:creationId xmlns:a16="http://schemas.microsoft.com/office/drawing/2014/main" id="{557FE698-4931-8F3F-0BF1-4E6B330CED13}"/>
+              </a:ext>
+            </a:extLst>
+          </p:cNvPr>
+          <p:cNvPicPr>
+            <a:picLocks noChangeAspect="1"/>
+          </p:cNvPicPr>
+          <p:nvPr/>
+        </p:nvPicPr>
+        <p:blipFill>
+          <a:blip r:embed="rId6"/>
+          <a:stretch>
+            <a:fillRect/>
+          </a:stretch>
+        </p:blipFill>
+        <p:spPr>
+          <a:xfrm>
+            <a:off x="4394992" y="808892"/>
+            <a:ext cx="4032767" cy="5005753"/>
+          </a:xfrm>
+          <a:prstGeom prst="rect">
+            <a:avLst/>
+          </a:prstGeom>
+        </p:spPr>
+      </p:pic>
+      <p:pic>
+        <p:nvPicPr>
+          <p:cNvPr id="22" name="Image 21" descr="Une image contenant texte, capture d’écran, Caractère coloré, diagramme&#10;&#10;Le contenu généré par l’IA peut être incorrect.">
+            <a:extLst>
+              <a:ext uri="{FF2B5EF4-FFF2-40B4-BE49-F238E27FC236}">
+                <a16:creationId xmlns:a16="http://schemas.microsoft.com/office/drawing/2014/main" id="{B3BDA32F-8AB2-D6DF-4F68-D1D9BBE51C95}"/>
+              </a:ext>
+            </a:extLst>
+          </p:cNvPr>
+          <p:cNvPicPr>
+            <a:picLocks noChangeAspect="1"/>
+          </p:cNvPicPr>
+          <p:nvPr/>
+        </p:nvPicPr>
+        <p:blipFill>
+          <a:blip r:embed="rId7"/>
+          <a:stretch>
+            <a:fillRect/>
+          </a:stretch>
+        </p:blipFill>
+        <p:spPr>
+          <a:xfrm>
+            <a:off x="8053803" y="1262880"/>
+            <a:ext cx="3872759" cy="4332239"/>
+          </a:xfrm>
+          <a:prstGeom prst="rect">
+            <a:avLst/>
+          </a:prstGeom>
+        </p:spPr>
+      </p:pic>
+    </p:spTree>
+    <p:extLst>
+      <p:ext uri="{BB962C8B-B14F-4D97-AF65-F5344CB8AC3E}">
+        <p14:creationId xmlns:p14="http://schemas.microsoft.com/office/powerpoint/2010/main" val="1658948200"/>
+      </p:ext>
+    </p:extLst>
+  </p:cSld>
+  <p:clrMapOvr>
+    <a:masterClrMapping/>
+  </p:clrMapOvr>
+</p:sld>
+</file>
+
+<file path=ppt/slides/slide16.xml><?xml version="1.0" encoding="utf-8"?>
+<p:sld xmlns:a="http://schemas.openxmlformats.org/drawingml/2006/main" xmlns:r="http://schemas.openxmlformats.org/officeDocument/2006/relationships" xmlns:p="http://schemas.openxmlformats.org/presentationml/2006/main">
+  <p:cSld>
+    <p:spTree>
+      <p:nvGrpSpPr>
+        <p:cNvPr id="1" name="">
+          <a:extLst>
+            <a:ext uri="{FF2B5EF4-FFF2-40B4-BE49-F238E27FC236}">
+              <a16:creationId xmlns:a16="http://schemas.microsoft.com/office/drawing/2014/main" id="{9DBDB2A6-697F-F428-E6E1-D64B64560F32}"/>
+            </a:ext>
+          </a:extLst>
+        </p:cNvPr>
+        <p:cNvGrpSpPr/>
+        <p:nvPr/>
+      </p:nvGrpSpPr>
+      <p:grpSpPr>
+        <a:xfrm>
+          <a:off x="0" y="0"/>
+          <a:ext cx="0" cy="0"/>
+          <a:chOff x="0" y="0"/>
+          <a:chExt cx="0" cy="0"/>
+        </a:xfrm>
+      </p:grpSpPr>
+      <p:sp>
+        <p:nvSpPr>
+          <p:cNvPr id="2" name="ZoneTexte 1">
+            <a:extLst>
+              <a:ext uri="{FF2B5EF4-FFF2-40B4-BE49-F238E27FC236}">
+                <a16:creationId xmlns:a16="http://schemas.microsoft.com/office/drawing/2014/main" id="{F2C1FBA5-62A0-A2A6-23B6-FA91B8E62998}"/>
+              </a:ext>
+            </a:extLst>
+          </p:cNvPr>
+          <p:cNvSpPr txBox="1"/>
+          <p:nvPr/>
+        </p:nvSpPr>
+        <p:spPr>
+          <a:xfrm>
+            <a:off x="601579" y="252664"/>
+            <a:ext cx="5472524" cy="369332"/>
+          </a:xfrm>
+          <a:prstGeom prst="rect">
+            <a:avLst/>
+          </a:prstGeom>
+          <a:noFill/>
+        </p:spPr>
+        <p:txBody>
+          <a:bodyPr wrap="none" rtlCol="0">
+            <a:spAutoFit/>
+          </a:bodyPr>
+          <a:lstStyle/>
+          <a:p>
+            <a:r>
+              <a:rPr lang="en-US" b="1" noProof="0" dirty="0"/>
+              <a:t>Target Selection –  target (</a:t>
+            </a:r>
+            <a:r>
+              <a:rPr lang="en-US" sz="1800" b="1" dirty="0"/>
+              <a:t>not diabetes/</a:t>
+            </a:r>
+            <a:r>
+              <a:rPr lang="en-US" sz="1800" b="1" noProof="0" dirty="0"/>
+              <a:t> prediabetes)</a:t>
+            </a:r>
+            <a:endParaRPr lang="en-US" b="1" noProof="0" dirty="0"/>
+          </a:p>
+        </p:txBody>
+      </p:sp>
+      <p:sp>
+        <p:nvSpPr>
+          <p:cNvPr id="3" name="ZoneTexte 2">
+            <a:extLst>
+              <a:ext uri="{FF2B5EF4-FFF2-40B4-BE49-F238E27FC236}">
+                <a16:creationId xmlns:a16="http://schemas.microsoft.com/office/drawing/2014/main" id="{936B66DC-80CC-EAFC-DF58-0B6CCCF06DE8}"/>
+              </a:ext>
+            </a:extLst>
+          </p:cNvPr>
+          <p:cNvSpPr txBox="1"/>
+          <p:nvPr/>
+        </p:nvSpPr>
+        <p:spPr>
+          <a:xfrm>
+            <a:off x="347500" y="909629"/>
+            <a:ext cx="1409360" cy="738664"/>
+          </a:xfrm>
+          <a:prstGeom prst="rect">
+            <a:avLst/>
+          </a:prstGeom>
+          <a:noFill/>
+        </p:spPr>
+        <p:txBody>
+          <a:bodyPr wrap="none" rtlCol="0">
+            <a:spAutoFit/>
+          </a:bodyPr>
+          <a:lstStyle/>
+          <a:p>
+            <a:r>
+              <a:rPr lang="en-US" sz="1400" b="1" noProof="0" dirty="0"/>
+              <a:t>Target :</a:t>
+            </a:r>
+          </a:p>
+          <a:p>
+            <a:r>
+              <a:rPr lang="en-US" sz="1400" b="1" dirty="0"/>
+              <a:t>0 – not diabetes</a:t>
+            </a:r>
+          </a:p>
+          <a:p>
+            <a:r>
+              <a:rPr lang="en-US" sz="1400" b="1" noProof="0" dirty="0"/>
+              <a:t>1 – prediabetes</a:t>
+            </a:r>
+          </a:p>
+        </p:txBody>
+      </p:sp>
+      <p:pic>
+        <p:nvPicPr>
+          <p:cNvPr id="5" name="Image 4" descr="Une image contenant texte, reçu, Police, blanc&#10;&#10;Le contenu généré par l’IA peut être incorrect.">
+            <a:extLst>
+              <a:ext uri="{FF2B5EF4-FFF2-40B4-BE49-F238E27FC236}">
+                <a16:creationId xmlns:a16="http://schemas.microsoft.com/office/drawing/2014/main" id="{8A5EABA4-AAA4-5D54-BB86-1ED11E119588}"/>
+              </a:ext>
+            </a:extLst>
+          </p:cNvPr>
+          <p:cNvPicPr>
+            <a:picLocks noChangeAspect="1"/>
+          </p:cNvPicPr>
+          <p:nvPr/>
+        </p:nvPicPr>
+        <p:blipFill>
+          <a:blip r:embed="rId2"/>
+          <a:stretch>
+            <a:fillRect/>
+          </a:stretch>
+        </p:blipFill>
+        <p:spPr>
+          <a:xfrm>
+            <a:off x="212969" y="1648293"/>
+            <a:ext cx="2387600" cy="876300"/>
+          </a:xfrm>
+          <a:prstGeom prst="rect">
+            <a:avLst/>
+          </a:prstGeom>
+        </p:spPr>
+      </p:pic>
+      <p:pic>
+        <p:nvPicPr>
+          <p:cNvPr id="7" name="Image 6" descr="Une image contenant texte, Police, capture d’écran, nombre&#10;&#10;Le contenu généré par l’IA peut être incorrect.">
+            <a:extLst>
+              <a:ext uri="{FF2B5EF4-FFF2-40B4-BE49-F238E27FC236}">
+                <a16:creationId xmlns:a16="http://schemas.microsoft.com/office/drawing/2014/main" id="{19F3A696-CA1F-2514-8C72-14E084F84175}"/>
+              </a:ext>
+            </a:extLst>
+          </p:cNvPr>
+          <p:cNvPicPr>
+            <a:picLocks noChangeAspect="1"/>
+          </p:cNvPicPr>
+          <p:nvPr/>
+        </p:nvPicPr>
+        <p:blipFill>
+          <a:blip r:embed="rId3"/>
+          <a:stretch>
+            <a:fillRect/>
+          </a:stretch>
+        </p:blipFill>
+        <p:spPr>
+          <a:xfrm>
+            <a:off x="2102694" y="1408622"/>
+            <a:ext cx="2400300" cy="736600"/>
+          </a:xfrm>
+          <a:prstGeom prst="rect">
+            <a:avLst/>
+          </a:prstGeom>
+        </p:spPr>
+      </p:pic>
+      <p:pic>
+        <p:nvPicPr>
+          <p:cNvPr id="10" name="Image 9" descr="Une image contenant texte, reçu, capture d’écran, Police&#10;&#10;Le contenu généré par l’IA peut être incorrect.">
+            <a:extLst>
+              <a:ext uri="{FF2B5EF4-FFF2-40B4-BE49-F238E27FC236}">
+                <a16:creationId xmlns:a16="http://schemas.microsoft.com/office/drawing/2014/main" id="{B0EC3AEF-44F1-1AF2-29C1-81CBDF0BCC41}"/>
+              </a:ext>
+            </a:extLst>
+          </p:cNvPr>
+          <p:cNvPicPr>
+            <a:picLocks noChangeAspect="1"/>
+          </p:cNvPicPr>
+          <p:nvPr/>
+        </p:nvPicPr>
+        <p:blipFill>
+          <a:blip r:embed="rId4"/>
+          <a:stretch>
+            <a:fillRect/>
+          </a:stretch>
+        </p:blipFill>
+        <p:spPr>
+          <a:xfrm>
+            <a:off x="347500" y="2530008"/>
+            <a:ext cx="3415608" cy="1452145"/>
+          </a:xfrm>
+          <a:prstGeom prst="rect">
+            <a:avLst/>
+          </a:prstGeom>
+        </p:spPr>
+      </p:pic>
+      <p:pic>
+        <p:nvPicPr>
+          <p:cNvPr id="12" name="Image 11" descr="Une image contenant texte, capture d’écran, Police, reçu&#10;&#10;Le contenu généré par l’IA peut être incorrect.">
+            <a:extLst>
+              <a:ext uri="{FF2B5EF4-FFF2-40B4-BE49-F238E27FC236}">
+                <a16:creationId xmlns:a16="http://schemas.microsoft.com/office/drawing/2014/main" id="{C2CE0546-57C3-478B-35C8-6959C8AF6395}"/>
+              </a:ext>
+            </a:extLst>
+          </p:cNvPr>
+          <p:cNvPicPr>
+            <a:picLocks noChangeAspect="1"/>
+          </p:cNvPicPr>
+          <p:nvPr/>
+        </p:nvPicPr>
+        <p:blipFill>
+          <a:blip r:embed="rId5"/>
+          <a:stretch>
+            <a:fillRect/>
+          </a:stretch>
+        </p:blipFill>
+        <p:spPr>
+          <a:xfrm>
+            <a:off x="246184" y="4221824"/>
+            <a:ext cx="3713021" cy="1563377"/>
+          </a:xfrm>
+          <a:prstGeom prst="rect">
+            <a:avLst/>
+          </a:prstGeom>
+        </p:spPr>
+      </p:pic>
+      <p:pic>
+        <p:nvPicPr>
+          <p:cNvPr id="15" name="Image 14" descr="Une image contenant texte, capture d’écran&#10;&#10;Le contenu généré par l’IA peut être incorrect.">
+            <a:extLst>
+              <a:ext uri="{FF2B5EF4-FFF2-40B4-BE49-F238E27FC236}">
+                <a16:creationId xmlns:a16="http://schemas.microsoft.com/office/drawing/2014/main" id="{6FCD8CB2-319A-D86C-A865-3452DA56CA1C}"/>
+              </a:ext>
+            </a:extLst>
+          </p:cNvPr>
+          <p:cNvPicPr>
+            <a:picLocks noChangeAspect="1"/>
+          </p:cNvPicPr>
+          <p:nvPr/>
+        </p:nvPicPr>
+        <p:blipFill>
+          <a:blip r:embed="rId6"/>
+          <a:stretch>
+            <a:fillRect/>
+          </a:stretch>
+        </p:blipFill>
+        <p:spPr>
+          <a:xfrm>
+            <a:off x="4563159" y="1175880"/>
+            <a:ext cx="3716784" cy="4506240"/>
+          </a:xfrm>
+          <a:prstGeom prst="rect">
+            <a:avLst/>
+          </a:prstGeom>
+        </p:spPr>
+      </p:pic>
+      <p:pic>
+        <p:nvPicPr>
+          <p:cNvPr id="19" name="Image 18" descr="Une image contenant texte, capture d’écran, conception&#10;&#10;Le contenu généré par l’IA peut être incorrect.">
+            <a:extLst>
+              <a:ext uri="{FF2B5EF4-FFF2-40B4-BE49-F238E27FC236}">
+                <a16:creationId xmlns:a16="http://schemas.microsoft.com/office/drawing/2014/main" id="{42CC442B-0756-96E4-E523-34575C8F98C4}"/>
+              </a:ext>
+            </a:extLst>
+          </p:cNvPr>
+          <p:cNvPicPr>
+            <a:picLocks noChangeAspect="1"/>
+          </p:cNvPicPr>
+          <p:nvPr/>
+        </p:nvPicPr>
+        <p:blipFill>
+          <a:blip r:embed="rId7"/>
+          <a:stretch>
+            <a:fillRect/>
+          </a:stretch>
+        </p:blipFill>
+        <p:spPr>
+          <a:xfrm>
+            <a:off x="8232525" y="1245308"/>
+            <a:ext cx="3746506" cy="4355741"/>
+          </a:xfrm>
+          <a:prstGeom prst="rect">
+            <a:avLst/>
+          </a:prstGeom>
+        </p:spPr>
+      </p:pic>
+    </p:spTree>
+    <p:extLst>
+      <p:ext uri="{BB962C8B-B14F-4D97-AF65-F5344CB8AC3E}">
+        <p14:creationId xmlns:p14="http://schemas.microsoft.com/office/powerpoint/2010/main" val="3600735536"/>
+      </p:ext>
+    </p:extLst>
+  </p:cSld>
+  <p:clrMapOvr>
+    <a:masterClrMapping/>
+  </p:clrMapOvr>
+</p:sld>
+</file>
+
+<file path=ppt/slides/slide17.xml><?xml version="1.0" encoding="utf-8"?>
+<p:sld xmlns:a="http://schemas.openxmlformats.org/drawingml/2006/main" xmlns:r="http://schemas.openxmlformats.org/officeDocument/2006/relationships" xmlns:p="http://schemas.openxmlformats.org/presentationml/2006/main">
+  <p:cSld>
+    <p:spTree>
+      <p:nvGrpSpPr>
+        <p:cNvPr id="1" name="">
+          <a:extLst>
+            <a:ext uri="{FF2B5EF4-FFF2-40B4-BE49-F238E27FC236}">
+              <a16:creationId xmlns:a16="http://schemas.microsoft.com/office/drawing/2014/main" id="{0B578B0C-1446-C5E5-4769-9F12D3210B4E}"/>
+            </a:ext>
+          </a:extLst>
+        </p:cNvPr>
+        <p:cNvGrpSpPr/>
+        <p:nvPr/>
+      </p:nvGrpSpPr>
+      <p:grpSpPr>
+        <a:xfrm>
+          <a:off x="0" y="0"/>
+          <a:ext cx="0" cy="0"/>
+          <a:chOff x="0" y="0"/>
+          <a:chExt cx="0" cy="0"/>
+        </a:xfrm>
+      </p:grpSpPr>
+      <p:sp>
+        <p:nvSpPr>
+          <p:cNvPr id="2" name="ZoneTexte 1">
+            <a:extLst>
+              <a:ext uri="{FF2B5EF4-FFF2-40B4-BE49-F238E27FC236}">
+                <a16:creationId xmlns:a16="http://schemas.microsoft.com/office/drawing/2014/main" id="{8794BCF1-DC31-6539-A379-0D42D49AE65D}"/>
+              </a:ext>
+            </a:extLst>
+          </p:cNvPr>
+          <p:cNvSpPr txBox="1"/>
+          <p:nvPr/>
+        </p:nvSpPr>
+        <p:spPr>
+          <a:xfrm>
+            <a:off x="601579" y="252664"/>
+            <a:ext cx="6972935" cy="369332"/>
+          </a:xfrm>
+          <a:prstGeom prst="rect">
+            <a:avLst/>
+          </a:prstGeom>
+          <a:noFill/>
+        </p:spPr>
+        <p:txBody>
+          <a:bodyPr wrap="none" rtlCol="0">
+            <a:spAutoFit/>
+          </a:bodyPr>
+          <a:lstStyle/>
+          <a:p>
+            <a:r>
+              <a:rPr lang="en-US" b="1" noProof="0" dirty="0"/>
+              <a:t>Target Selection –  target (</a:t>
+            </a:r>
+            <a:r>
+              <a:rPr lang="en-US" sz="1800" b="1" dirty="0">
+                <a:latin typeface="Times New Roman" panose="02020603050405020304" pitchFamily="18" charset="0"/>
+                <a:cs typeface="Times New Roman" panose="02020603050405020304" pitchFamily="18" charset="0"/>
+              </a:rPr>
+              <a:t>not </a:t>
+            </a:r>
+            <a:r>
+              <a:rPr lang="fr-FR" sz="1800" dirty="0" err="1">
+                <a:solidFill>
+                  <a:srgbClr val="000000"/>
+                </a:solidFill>
+                <a:effectLst/>
+                <a:latin typeface="Times New Roman" panose="02020603050405020304" pitchFamily="18" charset="0"/>
+                <a:cs typeface="Times New Roman" panose="02020603050405020304" pitchFamily="18" charset="0"/>
+              </a:rPr>
+              <a:t>Insulin_Resistance</a:t>
+            </a:r>
+            <a:r>
+              <a:rPr lang="en-US" sz="1800" b="1" dirty="0"/>
+              <a:t>/</a:t>
+            </a:r>
+            <a:r>
+              <a:rPr lang="en-US" sz="1800" b="1" noProof="0" dirty="0"/>
+              <a:t> </a:t>
+            </a:r>
+            <a:r>
+              <a:rPr lang="fr-FR" sz="1800" dirty="0" err="1">
+                <a:solidFill>
+                  <a:srgbClr val="000000"/>
+                </a:solidFill>
+                <a:effectLst/>
+                <a:latin typeface="Times New Roman" panose="02020603050405020304" pitchFamily="18" charset="0"/>
+                <a:cs typeface="Times New Roman" panose="02020603050405020304" pitchFamily="18" charset="0"/>
+              </a:rPr>
+              <a:t>Insulin_Resistance</a:t>
+            </a:r>
+            <a:r>
+              <a:rPr lang="en-US" sz="1800" b="1" noProof="0" dirty="0"/>
+              <a:t>)</a:t>
+            </a:r>
+            <a:endParaRPr lang="en-US" b="1" noProof="0" dirty="0"/>
+          </a:p>
+        </p:txBody>
+      </p:sp>
+      <p:sp>
+        <p:nvSpPr>
+          <p:cNvPr id="3" name="ZoneTexte 2">
+            <a:extLst>
+              <a:ext uri="{FF2B5EF4-FFF2-40B4-BE49-F238E27FC236}">
+                <a16:creationId xmlns:a16="http://schemas.microsoft.com/office/drawing/2014/main" id="{A70131AE-114A-E750-0551-569DDCF9A27F}"/>
+              </a:ext>
+            </a:extLst>
+          </p:cNvPr>
+          <p:cNvSpPr txBox="1"/>
+          <p:nvPr/>
+        </p:nvSpPr>
+        <p:spPr>
+          <a:xfrm>
+            <a:off x="347500" y="909629"/>
+            <a:ext cx="2111475" cy="738664"/>
+          </a:xfrm>
+          <a:prstGeom prst="rect">
+            <a:avLst/>
+          </a:prstGeom>
+          <a:noFill/>
+        </p:spPr>
+        <p:txBody>
+          <a:bodyPr wrap="none" rtlCol="0">
+            <a:spAutoFit/>
+          </a:bodyPr>
+          <a:lstStyle/>
+          <a:p>
+            <a:r>
+              <a:rPr lang="en-US" sz="1400" b="1" noProof="0" dirty="0">
+                <a:latin typeface="Times New Roman" panose="02020603050405020304" pitchFamily="18" charset="0"/>
+                <a:cs typeface="Times New Roman" panose="02020603050405020304" pitchFamily="18" charset="0"/>
+              </a:rPr>
+              <a:t>Target :</a:t>
+            </a:r>
+          </a:p>
+          <a:p>
+            <a:r>
+              <a:rPr lang="en-US" sz="1400" b="1" dirty="0">
+                <a:latin typeface="Times New Roman" panose="02020603050405020304" pitchFamily="18" charset="0"/>
+                <a:cs typeface="Times New Roman" panose="02020603050405020304" pitchFamily="18" charset="0"/>
+              </a:rPr>
+              <a:t>0 – not </a:t>
+            </a:r>
+            <a:r>
+              <a:rPr lang="fr-FR" sz="1400" dirty="0" err="1">
+                <a:solidFill>
+                  <a:srgbClr val="000000"/>
+                </a:solidFill>
+                <a:effectLst/>
+                <a:latin typeface="Times New Roman" panose="02020603050405020304" pitchFamily="18" charset="0"/>
+                <a:cs typeface="Times New Roman" panose="02020603050405020304" pitchFamily="18" charset="0"/>
+              </a:rPr>
+              <a:t>Insulin_Resistance</a:t>
+            </a:r>
+            <a:endParaRPr lang="en-US" sz="1400" b="1" dirty="0">
+              <a:latin typeface="Times New Roman" panose="02020603050405020304" pitchFamily="18" charset="0"/>
+              <a:cs typeface="Times New Roman" panose="02020603050405020304" pitchFamily="18" charset="0"/>
+            </a:endParaRPr>
+          </a:p>
+          <a:p>
+            <a:r>
+              <a:rPr lang="en-US" sz="1400" b="1" noProof="0" dirty="0">
+                <a:latin typeface="Times New Roman" panose="02020603050405020304" pitchFamily="18" charset="0"/>
+                <a:cs typeface="Times New Roman" panose="02020603050405020304" pitchFamily="18" charset="0"/>
+              </a:rPr>
+              <a:t>1 – </a:t>
+            </a:r>
+            <a:r>
+              <a:rPr lang="fr-FR" sz="1400" dirty="0" err="1">
+                <a:solidFill>
+                  <a:srgbClr val="000000"/>
+                </a:solidFill>
+                <a:effectLst/>
+                <a:latin typeface="Times New Roman" panose="02020603050405020304" pitchFamily="18" charset="0"/>
+                <a:cs typeface="Times New Roman" panose="02020603050405020304" pitchFamily="18" charset="0"/>
+              </a:rPr>
+              <a:t>Insulin_Resistance</a:t>
+            </a:r>
+            <a:endParaRPr lang="fr-FR" sz="1400" dirty="0">
+              <a:solidFill>
+                <a:srgbClr val="000000"/>
+              </a:solidFill>
+              <a:effectLst/>
+              <a:latin typeface="Times New Roman" panose="02020603050405020304" pitchFamily="18" charset="0"/>
+              <a:cs typeface="Times New Roman" panose="02020603050405020304" pitchFamily="18" charset="0"/>
+            </a:endParaRPr>
+          </a:p>
+        </p:txBody>
+      </p:sp>
+      <p:pic>
+        <p:nvPicPr>
+          <p:cNvPr id="6" name="Image 5">
+            <a:extLst>
+              <a:ext uri="{FF2B5EF4-FFF2-40B4-BE49-F238E27FC236}">
+                <a16:creationId xmlns:a16="http://schemas.microsoft.com/office/drawing/2014/main" id="{135D2AE3-D8A2-5EAA-E6EA-442F916D714D}"/>
+              </a:ext>
+            </a:extLst>
+          </p:cNvPr>
+          <p:cNvPicPr>
+            <a:picLocks noChangeAspect="1"/>
+          </p:cNvPicPr>
+          <p:nvPr/>
+        </p:nvPicPr>
+        <p:blipFill>
+          <a:blip r:embed="rId2"/>
+          <a:stretch>
+            <a:fillRect/>
+          </a:stretch>
+        </p:blipFill>
+        <p:spPr>
+          <a:xfrm>
+            <a:off x="191431" y="1768845"/>
+            <a:ext cx="1556988" cy="594486"/>
+          </a:xfrm>
+          <a:prstGeom prst="rect">
+            <a:avLst/>
+          </a:prstGeom>
+        </p:spPr>
+      </p:pic>
+      <p:pic>
+        <p:nvPicPr>
+          <p:cNvPr id="9" name="Image 8" descr="Une image contenant texte, Police, capture d’écran, nombre&#10;&#10;Le contenu généré par l’IA peut être incorrect.">
+            <a:extLst>
+              <a:ext uri="{FF2B5EF4-FFF2-40B4-BE49-F238E27FC236}">
+                <a16:creationId xmlns:a16="http://schemas.microsoft.com/office/drawing/2014/main" id="{3FB4D4E0-927D-16C0-F6FC-972EE92C7E7D}"/>
+              </a:ext>
+            </a:extLst>
+          </p:cNvPr>
+          <p:cNvPicPr>
+            <a:picLocks noChangeAspect="1"/>
+          </p:cNvPicPr>
+          <p:nvPr/>
+        </p:nvPicPr>
+        <p:blipFill>
+          <a:blip r:embed="rId3"/>
+          <a:stretch>
+            <a:fillRect/>
+          </a:stretch>
+        </p:blipFill>
+        <p:spPr>
+          <a:xfrm>
+            <a:off x="1888071" y="1796499"/>
+            <a:ext cx="2111475" cy="653034"/>
+          </a:xfrm>
+          <a:prstGeom prst="rect">
+            <a:avLst/>
+          </a:prstGeom>
+        </p:spPr>
+      </p:pic>
+      <p:pic>
+        <p:nvPicPr>
+          <p:cNvPr id="13" name="Image 12" descr="Une image contenant texte, capture d’écran, Police, reçu&#10;&#10;Le contenu généré par l’IA peut être incorrect.">
+            <a:extLst>
+              <a:ext uri="{FF2B5EF4-FFF2-40B4-BE49-F238E27FC236}">
+                <a16:creationId xmlns:a16="http://schemas.microsoft.com/office/drawing/2014/main" id="{500B9DD8-1948-4064-27E0-87342A0EE17C}"/>
+              </a:ext>
+            </a:extLst>
+          </p:cNvPr>
+          <p:cNvPicPr>
+            <a:picLocks noChangeAspect="1"/>
+          </p:cNvPicPr>
+          <p:nvPr/>
+        </p:nvPicPr>
+        <p:blipFill>
+          <a:blip r:embed="rId4"/>
+          <a:stretch>
+            <a:fillRect/>
+          </a:stretch>
+        </p:blipFill>
+        <p:spPr>
+          <a:xfrm>
+            <a:off x="191431" y="2647753"/>
+            <a:ext cx="3652049" cy="1636378"/>
+          </a:xfrm>
+          <a:prstGeom prst="rect">
+            <a:avLst/>
+          </a:prstGeom>
+        </p:spPr>
+      </p:pic>
+      <p:pic>
+        <p:nvPicPr>
+          <p:cNvPr id="16" name="Image 15" descr="Une image contenant texte, capture d’écran, Police, reçu&#10;&#10;Le contenu généré par l’IA peut être incorrect.">
+            <a:extLst>
+              <a:ext uri="{FF2B5EF4-FFF2-40B4-BE49-F238E27FC236}">
+                <a16:creationId xmlns:a16="http://schemas.microsoft.com/office/drawing/2014/main" id="{A8F67096-CB08-4D5D-679E-620FC3D6F147}"/>
+              </a:ext>
+            </a:extLst>
+          </p:cNvPr>
+          <p:cNvPicPr>
+            <a:picLocks noChangeAspect="1"/>
+          </p:cNvPicPr>
+          <p:nvPr/>
+        </p:nvPicPr>
+        <p:blipFill>
+          <a:blip r:embed="rId5"/>
+          <a:stretch>
+            <a:fillRect/>
+          </a:stretch>
+        </p:blipFill>
+        <p:spPr>
+          <a:xfrm>
+            <a:off x="35363" y="4277070"/>
+            <a:ext cx="3964183" cy="1636378"/>
+          </a:xfrm>
+          <a:prstGeom prst="rect">
+            <a:avLst/>
+          </a:prstGeom>
+        </p:spPr>
+      </p:pic>
+      <p:pic>
+        <p:nvPicPr>
+          <p:cNvPr id="18" name="Image 17" descr="Une image contenant texte, capture d’écran, ligne, diagramme&#10;&#10;Le contenu généré par l’IA peut être incorrect.">
+            <a:extLst>
+              <a:ext uri="{FF2B5EF4-FFF2-40B4-BE49-F238E27FC236}">
+                <a16:creationId xmlns:a16="http://schemas.microsoft.com/office/drawing/2014/main" id="{537D0A81-3EDC-1573-1061-EDFFDD06B0DB}"/>
+              </a:ext>
+            </a:extLst>
+          </p:cNvPr>
+          <p:cNvPicPr>
+            <a:picLocks noChangeAspect="1"/>
+          </p:cNvPicPr>
+          <p:nvPr/>
+        </p:nvPicPr>
+        <p:blipFill>
+          <a:blip r:embed="rId6"/>
+          <a:stretch>
+            <a:fillRect/>
+          </a:stretch>
+        </p:blipFill>
+        <p:spPr>
+          <a:xfrm>
+            <a:off x="3983132" y="837091"/>
+            <a:ext cx="4360033" cy="5183818"/>
+          </a:xfrm>
+          <a:prstGeom prst="rect">
+            <a:avLst/>
+          </a:prstGeom>
+        </p:spPr>
+      </p:pic>
+      <p:pic>
+        <p:nvPicPr>
+          <p:cNvPr id="21" name="Image 20" descr="Une image contenant texte, capture d’écran, Police, conception&#10;&#10;Le contenu généré par l’IA peut être incorrect.">
+            <a:extLst>
+              <a:ext uri="{FF2B5EF4-FFF2-40B4-BE49-F238E27FC236}">
+                <a16:creationId xmlns:a16="http://schemas.microsoft.com/office/drawing/2014/main" id="{7F19A4D1-9FCC-6680-0337-509B9079FD81}"/>
+              </a:ext>
+            </a:extLst>
+          </p:cNvPr>
+          <p:cNvPicPr>
+            <a:picLocks noChangeAspect="1"/>
+          </p:cNvPicPr>
+          <p:nvPr/>
+        </p:nvPicPr>
+        <p:blipFill>
+          <a:blip r:embed="rId7"/>
+          <a:stretch>
+            <a:fillRect/>
+          </a:stretch>
+        </p:blipFill>
+        <p:spPr>
+          <a:xfrm>
+            <a:off x="7947315" y="1071553"/>
+            <a:ext cx="3936524" cy="4520355"/>
+          </a:xfrm>
+          <a:prstGeom prst="rect">
+            <a:avLst/>
+          </a:prstGeom>
+        </p:spPr>
+      </p:pic>
+    </p:spTree>
+    <p:extLst>
+      <p:ext uri="{BB962C8B-B14F-4D97-AF65-F5344CB8AC3E}">
+        <p14:creationId xmlns:p14="http://schemas.microsoft.com/office/powerpoint/2010/main" val="2888021078"/>
+      </p:ext>
+    </p:extLst>
+  </p:cSld>
+  <p:clrMapOvr>
+    <a:masterClrMapping/>
+  </p:clrMapOvr>
+</p:sld>
+</file>
+
+<file path=ppt/slides/slide18.xml><?xml version="1.0" encoding="utf-8"?>
+<p:sld xmlns:a="http://schemas.openxmlformats.org/drawingml/2006/main" xmlns:r="http://schemas.openxmlformats.org/officeDocument/2006/relationships" xmlns:p="http://schemas.openxmlformats.org/presentationml/2006/main">
+  <p:cSld>
+    <p:spTree>
+      <p:nvGrpSpPr>
+        <p:cNvPr id="1" name="">
+          <a:extLst>
+            <a:ext uri="{FF2B5EF4-FFF2-40B4-BE49-F238E27FC236}">
+              <a16:creationId xmlns:a16="http://schemas.microsoft.com/office/drawing/2014/main" id="{80E583B3-7E27-CE2C-490C-F4D243501246}"/>
+            </a:ext>
+          </a:extLst>
+        </p:cNvPr>
+        <p:cNvGrpSpPr/>
+        <p:nvPr/>
+      </p:nvGrpSpPr>
+      <p:grpSpPr>
+        <a:xfrm>
+          <a:off x="0" y="0"/>
+          <a:ext cx="0" cy="0"/>
+          <a:chOff x="0" y="0"/>
+          <a:chExt cx="0" cy="0"/>
+        </a:xfrm>
+      </p:grpSpPr>
+      <p:sp>
+        <p:nvSpPr>
+          <p:cNvPr id="2" name="ZoneTexte 1">
+            <a:extLst>
+              <a:ext uri="{FF2B5EF4-FFF2-40B4-BE49-F238E27FC236}">
+                <a16:creationId xmlns:a16="http://schemas.microsoft.com/office/drawing/2014/main" id="{0E118541-FA5A-2B28-DBC6-6731C742A1B3}"/>
+              </a:ext>
+            </a:extLst>
+          </p:cNvPr>
+          <p:cNvSpPr txBox="1"/>
+          <p:nvPr/>
+        </p:nvSpPr>
+        <p:spPr>
+          <a:xfrm>
+            <a:off x="601579" y="252664"/>
+            <a:ext cx="9387057" cy="369332"/>
+          </a:xfrm>
+          <a:prstGeom prst="rect">
+            <a:avLst/>
+          </a:prstGeom>
+          <a:noFill/>
+        </p:spPr>
+        <p:txBody>
+          <a:bodyPr wrap="none" rtlCol="0">
+            <a:spAutoFit/>
+          </a:bodyPr>
+          <a:lstStyle/>
+          <a:p>
+            <a:r>
+              <a:rPr lang="en-US" b="1" noProof="0" dirty="0"/>
+              <a:t>Target Selection –  target (</a:t>
+            </a:r>
+            <a:r>
+              <a:rPr lang="en-US" sz="1800" b="1" dirty="0"/>
+              <a:t>not diabetes/</a:t>
+            </a:r>
+            <a:r>
+              <a:rPr lang="en-US" sz="1800" b="1" noProof="0" dirty="0"/>
+              <a:t> prediabetes)</a:t>
+            </a:r>
+            <a:r>
+              <a:rPr lang="ru-RU" sz="1800" b="1" noProof="0" dirty="0"/>
+              <a:t> </a:t>
+            </a:r>
+            <a:r>
+              <a:rPr lang="en-US" sz="1800" b="1" noProof="0" dirty="0"/>
+              <a:t>with features (</a:t>
+            </a:r>
+            <a:r>
+              <a:rPr lang="fr-FR" sz="1800" dirty="0" err="1">
+                <a:solidFill>
+                  <a:srgbClr val="000000"/>
+                </a:solidFill>
+                <a:effectLst/>
+                <a:latin typeface="Times New Roman" panose="02020603050405020304" pitchFamily="18" charset="0"/>
+                <a:cs typeface="Times New Roman" panose="02020603050405020304" pitchFamily="18" charset="0"/>
+              </a:rPr>
+              <a:t>Insulin_Resistance</a:t>
+            </a:r>
+            <a:r>
+              <a:rPr lang="fr-FR" sz="1800" dirty="0">
+                <a:solidFill>
+                  <a:srgbClr val="000000"/>
+                </a:solidFill>
+                <a:effectLst/>
+                <a:latin typeface="Times New Roman" panose="02020603050405020304" pitchFamily="18" charset="0"/>
+                <a:cs typeface="Times New Roman" panose="02020603050405020304" pitchFamily="18" charset="0"/>
+              </a:rPr>
+              <a:t>/Mets3)</a:t>
+            </a:r>
+            <a:endParaRPr lang="en-US" b="1" noProof="0" dirty="0"/>
+          </a:p>
+        </p:txBody>
+      </p:sp>
+      <p:sp>
+        <p:nvSpPr>
+          <p:cNvPr id="3" name="ZoneTexte 2">
+            <a:extLst>
+              <a:ext uri="{FF2B5EF4-FFF2-40B4-BE49-F238E27FC236}">
+                <a16:creationId xmlns:a16="http://schemas.microsoft.com/office/drawing/2014/main" id="{89AC6834-617E-ABE0-F6DA-04782AADD63A}"/>
+              </a:ext>
+            </a:extLst>
+          </p:cNvPr>
+          <p:cNvSpPr txBox="1"/>
+          <p:nvPr/>
+        </p:nvSpPr>
+        <p:spPr>
+          <a:xfrm>
+            <a:off x="347500" y="909629"/>
+            <a:ext cx="1409360" cy="738664"/>
+          </a:xfrm>
+          <a:prstGeom prst="rect">
+            <a:avLst/>
+          </a:prstGeom>
+          <a:noFill/>
+        </p:spPr>
+        <p:txBody>
+          <a:bodyPr wrap="none" rtlCol="0">
+            <a:spAutoFit/>
+          </a:bodyPr>
+          <a:lstStyle/>
+          <a:p>
+            <a:r>
+              <a:rPr lang="en-US" sz="1400" b="1" noProof="0" dirty="0"/>
+              <a:t>Target :</a:t>
+            </a:r>
+          </a:p>
+          <a:p>
+            <a:r>
+              <a:rPr lang="en-US" sz="1400" b="1" dirty="0"/>
+              <a:t>0 – not diabetes</a:t>
+            </a:r>
+          </a:p>
+          <a:p>
+            <a:r>
+              <a:rPr lang="en-US" sz="1400" b="1" noProof="0" dirty="0"/>
+              <a:t>1 – prediabetes</a:t>
+            </a:r>
+          </a:p>
+        </p:txBody>
+      </p:sp>
+      <p:pic>
+        <p:nvPicPr>
+          <p:cNvPr id="5" name="Image 4" descr="Une image contenant texte, reçu, Police, blanc&#10;&#10;Le contenu généré par l’IA peut être incorrect.">
+            <a:extLst>
+              <a:ext uri="{FF2B5EF4-FFF2-40B4-BE49-F238E27FC236}">
+                <a16:creationId xmlns:a16="http://schemas.microsoft.com/office/drawing/2014/main" id="{F818759C-9643-662C-CC42-E1635E8B65B7}"/>
+              </a:ext>
+            </a:extLst>
+          </p:cNvPr>
+          <p:cNvPicPr>
+            <a:picLocks noChangeAspect="1"/>
+          </p:cNvPicPr>
+          <p:nvPr/>
+        </p:nvPicPr>
+        <p:blipFill>
+          <a:blip r:embed="rId2"/>
+          <a:stretch>
+            <a:fillRect/>
+          </a:stretch>
+        </p:blipFill>
+        <p:spPr>
+          <a:xfrm>
+            <a:off x="45884" y="1648293"/>
+            <a:ext cx="2012592" cy="738664"/>
+          </a:xfrm>
+          <a:prstGeom prst="rect">
+            <a:avLst/>
+          </a:prstGeom>
+        </p:spPr>
+      </p:pic>
+      <p:pic>
+        <p:nvPicPr>
+          <p:cNvPr id="8" name="Image 7" descr="Une image contenant texte, Police, capture d’écran, nombre&#10;&#10;Le contenu généré par l’IA peut être incorrect.">
+            <a:extLst>
+              <a:ext uri="{FF2B5EF4-FFF2-40B4-BE49-F238E27FC236}">
+                <a16:creationId xmlns:a16="http://schemas.microsoft.com/office/drawing/2014/main" id="{C1D98BA1-5F08-84E2-606B-FAE632209F38}"/>
+              </a:ext>
+            </a:extLst>
+          </p:cNvPr>
+          <p:cNvPicPr>
+            <a:picLocks noChangeAspect="1"/>
+          </p:cNvPicPr>
+          <p:nvPr/>
+        </p:nvPicPr>
+        <p:blipFill>
+          <a:blip r:embed="rId3"/>
+          <a:stretch>
+            <a:fillRect/>
+          </a:stretch>
+        </p:blipFill>
+        <p:spPr>
+          <a:xfrm>
+            <a:off x="1415583" y="1587252"/>
+            <a:ext cx="2377892" cy="637707"/>
+          </a:xfrm>
+          <a:prstGeom prst="rect">
+            <a:avLst/>
+          </a:prstGeom>
+        </p:spPr>
+      </p:pic>
+      <p:pic>
+        <p:nvPicPr>
+          <p:cNvPr id="11" name="Image 10" descr="Une image contenant texte, reçu, capture d’écran, Police&#10;&#10;Le contenu généré par l’IA peut être incorrect.">
+            <a:extLst>
+              <a:ext uri="{FF2B5EF4-FFF2-40B4-BE49-F238E27FC236}">
+                <a16:creationId xmlns:a16="http://schemas.microsoft.com/office/drawing/2014/main" id="{20CCEFA4-5822-0A8C-D296-E521C0902A19}"/>
+              </a:ext>
+            </a:extLst>
+          </p:cNvPr>
+          <p:cNvPicPr>
+            <a:picLocks noChangeAspect="1"/>
+          </p:cNvPicPr>
+          <p:nvPr/>
+        </p:nvPicPr>
+        <p:blipFill>
+          <a:blip r:embed="rId4"/>
+          <a:stretch>
+            <a:fillRect/>
+          </a:stretch>
+        </p:blipFill>
+        <p:spPr>
+          <a:xfrm>
+            <a:off x="143119" y="2447998"/>
+            <a:ext cx="2993577" cy="1293298"/>
+          </a:xfrm>
+          <a:prstGeom prst="rect">
+            <a:avLst/>
+          </a:prstGeom>
+        </p:spPr>
+      </p:pic>
+      <p:pic>
+        <p:nvPicPr>
+          <p:cNvPr id="14" name="Image 13" descr="Une image contenant texte, capture d’écran, Police, reçu&#10;&#10;Le contenu généré par l’IA peut être incorrect.">
+            <a:extLst>
+              <a:ext uri="{FF2B5EF4-FFF2-40B4-BE49-F238E27FC236}">
+                <a16:creationId xmlns:a16="http://schemas.microsoft.com/office/drawing/2014/main" id="{D7853BB8-134E-DD8F-E700-AF06850EF776}"/>
+              </a:ext>
+            </a:extLst>
+          </p:cNvPr>
+          <p:cNvPicPr>
+            <a:picLocks noChangeAspect="1"/>
+          </p:cNvPicPr>
+          <p:nvPr/>
+        </p:nvPicPr>
+        <p:blipFill>
+          <a:blip r:embed="rId5"/>
+          <a:stretch>
+            <a:fillRect/>
+          </a:stretch>
+        </p:blipFill>
+        <p:spPr>
+          <a:xfrm>
+            <a:off x="76973" y="3903295"/>
+            <a:ext cx="3090340" cy="1306412"/>
+          </a:xfrm>
+          <a:prstGeom prst="rect">
+            <a:avLst/>
+          </a:prstGeom>
+        </p:spPr>
+      </p:pic>
+      <p:pic>
+        <p:nvPicPr>
+          <p:cNvPr id="17" name="Image 16" descr="Une image contenant texte, capture d’écran&#10;&#10;Le contenu généré par l’IA peut être incorrect.">
+            <a:extLst>
+              <a:ext uri="{FF2B5EF4-FFF2-40B4-BE49-F238E27FC236}">
+                <a16:creationId xmlns:a16="http://schemas.microsoft.com/office/drawing/2014/main" id="{42ADD93C-9B25-884E-BF6E-3D2F800DF0EF}"/>
+              </a:ext>
+            </a:extLst>
+          </p:cNvPr>
+          <p:cNvPicPr>
+            <a:picLocks noChangeAspect="1"/>
+          </p:cNvPicPr>
+          <p:nvPr/>
+        </p:nvPicPr>
+        <p:blipFill>
+          <a:blip r:embed="rId6"/>
+          <a:stretch>
+            <a:fillRect/>
+          </a:stretch>
+        </p:blipFill>
+        <p:spPr>
+          <a:xfrm>
+            <a:off x="3793475" y="1104136"/>
+            <a:ext cx="4030455" cy="4815528"/>
+          </a:xfrm>
+          <a:prstGeom prst="rect">
+            <a:avLst/>
+          </a:prstGeom>
+        </p:spPr>
+      </p:pic>
+      <p:pic>
+        <p:nvPicPr>
+          <p:cNvPr id="20" name="Image 19" descr="Une image contenant texte, capture d’écran, conception&#10;&#10;Le contenu généré par l’IA peut être incorrect.">
+            <a:extLst>
+              <a:ext uri="{FF2B5EF4-FFF2-40B4-BE49-F238E27FC236}">
+                <a16:creationId xmlns:a16="http://schemas.microsoft.com/office/drawing/2014/main" id="{608157B9-40F2-AAAD-22F6-694E8AC6BD5E}"/>
+              </a:ext>
+            </a:extLst>
+          </p:cNvPr>
+          <p:cNvPicPr>
+            <a:picLocks noChangeAspect="1"/>
+          </p:cNvPicPr>
+          <p:nvPr/>
+        </p:nvPicPr>
+        <p:blipFill>
+          <a:blip r:embed="rId7"/>
+          <a:stretch>
+            <a:fillRect/>
+          </a:stretch>
+        </p:blipFill>
+        <p:spPr>
+          <a:xfrm>
+            <a:off x="7823930" y="1175316"/>
+            <a:ext cx="3944679" cy="4507367"/>
+          </a:xfrm>
+          <a:prstGeom prst="rect">
+            <a:avLst/>
+          </a:prstGeom>
+        </p:spPr>
+      </p:pic>
+      <p:pic>
+        <p:nvPicPr>
+          <p:cNvPr id="21" name="Image 20" descr="Une image contenant texte, Police, capture d’écran, nombre&#10;&#10;Le contenu généré par l’IA peut être incorrect.">
+            <a:extLst>
+              <a:ext uri="{FF2B5EF4-FFF2-40B4-BE49-F238E27FC236}">
+                <a16:creationId xmlns:a16="http://schemas.microsoft.com/office/drawing/2014/main" id="{8B943D91-8C26-69E9-8471-A8F6F918220E}"/>
+              </a:ext>
+            </a:extLst>
+          </p:cNvPr>
+          <p:cNvPicPr>
+            <a:picLocks noChangeAspect="1"/>
+          </p:cNvPicPr>
+          <p:nvPr/>
+        </p:nvPicPr>
+        <p:blipFill>
+          <a:blip r:embed="rId8"/>
+          <a:stretch>
+            <a:fillRect/>
+          </a:stretch>
+        </p:blipFill>
+        <p:spPr>
+          <a:xfrm>
+            <a:off x="1223463" y="5868736"/>
+            <a:ext cx="2400300" cy="736600"/>
+          </a:xfrm>
+          <a:prstGeom prst="rect">
+            <a:avLst/>
+          </a:prstGeom>
+        </p:spPr>
+      </p:pic>
+    </p:spTree>
+    <p:extLst>
+      <p:ext uri="{BB962C8B-B14F-4D97-AF65-F5344CB8AC3E}">
+        <p14:creationId xmlns:p14="http://schemas.microsoft.com/office/powerpoint/2010/main" val="3398141519"/>
+      </p:ext>
+    </p:extLst>
+  </p:cSld>
+  <p:clrMapOvr>
+    <a:masterClrMapping/>
+  </p:clrMapOvr>
+</p:sld>
+</file>
+
+<file path=ppt/slides/slide19.xml><?xml version="1.0" encoding="utf-8"?>
+<p:sld xmlns:a="http://schemas.openxmlformats.org/drawingml/2006/main" xmlns:r="http://schemas.openxmlformats.org/officeDocument/2006/relationships" xmlns:p="http://schemas.openxmlformats.org/presentationml/2006/main">
+  <p:cSld>
+    <p:spTree>
+      <p:nvGrpSpPr>
+        <p:cNvPr id="1" name=""/>
+        <p:cNvGrpSpPr/>
+        <p:nvPr/>
+      </p:nvGrpSpPr>
+      <p:grpSpPr>
+        <a:xfrm>
+          <a:off x="0" y="0"/>
+          <a:ext cx="0" cy="0"/>
+          <a:chOff x="0" y="0"/>
+          <a:chExt cx="0" cy="0"/>
+        </a:xfrm>
+      </p:grpSpPr>
+      <p:pic>
+        <p:nvPicPr>
+          <p:cNvPr id="2" name="Image 1">
+            <a:extLst>
+              <a:ext uri="{FF2B5EF4-FFF2-40B4-BE49-F238E27FC236}">
+                <a16:creationId xmlns:a16="http://schemas.microsoft.com/office/drawing/2014/main" id="{1E3A5BAC-BC78-0CEE-9945-F58927C89090}"/>
+              </a:ext>
+            </a:extLst>
+          </p:cNvPr>
+          <p:cNvPicPr>
+            <a:picLocks noChangeAspect="1"/>
+          </p:cNvPicPr>
+          <p:nvPr/>
+        </p:nvPicPr>
+        <p:blipFill>
+          <a:blip r:embed="rId2"/>
+          <a:stretch>
+            <a:fillRect/>
+          </a:stretch>
+        </p:blipFill>
+        <p:spPr>
+          <a:xfrm>
+            <a:off x="134817" y="926299"/>
+            <a:ext cx="8654259" cy="4606993"/>
+          </a:xfrm>
+          <a:prstGeom prst="rect">
+            <a:avLst/>
+          </a:prstGeom>
+        </p:spPr>
+      </p:pic>
+      <p:pic>
+        <p:nvPicPr>
+          <p:cNvPr id="4" name="Image 3" descr="Une image contenant texte, capture d’écran, Police, ligne&#10;&#10;Le contenu généré par l’IA peut être incorrect.">
+            <a:extLst>
+              <a:ext uri="{FF2B5EF4-FFF2-40B4-BE49-F238E27FC236}">
+                <a16:creationId xmlns:a16="http://schemas.microsoft.com/office/drawing/2014/main" id="{D0C948BF-A4C9-B080-814A-AF47DA0033AB}"/>
+              </a:ext>
+            </a:extLst>
+          </p:cNvPr>
+          <p:cNvPicPr>
+            <a:picLocks noChangeAspect="1"/>
+          </p:cNvPicPr>
+          <p:nvPr/>
+        </p:nvPicPr>
+        <p:blipFill>
+          <a:blip r:embed="rId3"/>
+          <a:stretch>
+            <a:fillRect/>
+          </a:stretch>
+        </p:blipFill>
+        <p:spPr>
+          <a:xfrm>
+            <a:off x="8896291" y="1512276"/>
+            <a:ext cx="3160892" cy="937847"/>
+          </a:xfrm>
+          <a:prstGeom prst="rect">
+            <a:avLst/>
+          </a:prstGeom>
+        </p:spPr>
+      </p:pic>
+    </p:spTree>
+    <p:extLst>
+      <p:ext uri="{BB962C8B-B14F-4D97-AF65-F5344CB8AC3E}">
+        <p14:creationId xmlns:p14="http://schemas.microsoft.com/office/powerpoint/2010/main" val="1831348650"/>
+      </p:ext>
+    </p:extLst>
+  </p:cSld>
+  <p:clrMapOvr>
+    <a:masterClrMapping/>
+  </p:clrMapOvr>
+</p:sld>
+</file>
+
 <file path=ppt/slides/slide2.xml><?xml version="1.0" encoding="utf-8"?>
 <p:sld xmlns:a="http://schemas.openxmlformats.org/drawingml/2006/main" xmlns:r="http://schemas.openxmlformats.org/officeDocument/2006/relationships" xmlns:p="http://schemas.openxmlformats.org/presentationml/2006/main">
   <p:cSld>
@@ -6178,6 +8217,884 @@
     <p:extLst>
       <p:ext uri="{BB962C8B-B14F-4D97-AF65-F5344CB8AC3E}">
         <p14:creationId xmlns:p14="http://schemas.microsoft.com/office/powerpoint/2010/main" val="3291096493"/>
+      </p:ext>
+    </p:extLst>
+  </p:cSld>
+  <p:clrMapOvr>
+    <a:masterClrMapping/>
+  </p:clrMapOvr>
+</p:sld>
+</file>
+
+<file path=ppt/slides/slide20.xml><?xml version="1.0" encoding="utf-8"?>
+<p:sld xmlns:a="http://schemas.openxmlformats.org/drawingml/2006/main" xmlns:r="http://schemas.openxmlformats.org/officeDocument/2006/relationships" xmlns:p="http://schemas.openxmlformats.org/presentationml/2006/main">
+  <p:cSld>
+    <p:spTree>
+      <p:nvGrpSpPr>
+        <p:cNvPr id="1" name="">
+          <a:extLst>
+            <a:ext uri="{FF2B5EF4-FFF2-40B4-BE49-F238E27FC236}">
+              <a16:creationId xmlns:a16="http://schemas.microsoft.com/office/drawing/2014/main" id="{47868BF9-E472-8B93-3EF7-2D4044744740}"/>
+            </a:ext>
+          </a:extLst>
+        </p:cNvPr>
+        <p:cNvGrpSpPr/>
+        <p:nvPr/>
+      </p:nvGrpSpPr>
+      <p:grpSpPr>
+        <a:xfrm>
+          <a:off x="0" y="0"/>
+          <a:ext cx="0" cy="0"/>
+          <a:chOff x="0" y="0"/>
+          <a:chExt cx="0" cy="0"/>
+        </a:xfrm>
+      </p:grpSpPr>
+      <p:pic>
+        <p:nvPicPr>
+          <p:cNvPr id="3" name="Image 2">
+            <a:extLst>
+              <a:ext uri="{FF2B5EF4-FFF2-40B4-BE49-F238E27FC236}">
+                <a16:creationId xmlns:a16="http://schemas.microsoft.com/office/drawing/2014/main" id="{AE358169-204E-B9EA-DFAF-9BE6E298CEC5}"/>
+              </a:ext>
+            </a:extLst>
+          </p:cNvPr>
+          <p:cNvPicPr>
+            <a:picLocks noChangeAspect="1"/>
+          </p:cNvPicPr>
+          <p:nvPr/>
+        </p:nvPicPr>
+        <p:blipFill>
+          <a:blip r:embed="rId2"/>
+          <a:stretch>
+            <a:fillRect/>
+          </a:stretch>
+        </p:blipFill>
+        <p:spPr>
+          <a:xfrm>
+            <a:off x="439616" y="1244221"/>
+            <a:ext cx="7772400" cy="4369558"/>
+          </a:xfrm>
+          <a:prstGeom prst="rect">
+            <a:avLst/>
+          </a:prstGeom>
+        </p:spPr>
+      </p:pic>
+      <p:pic>
+        <p:nvPicPr>
+          <p:cNvPr id="6" name="Image 5" descr="Une image contenant texte, capture d’écran, Police, nombre&#10;&#10;Le contenu généré par l’IA peut être incorrect.">
+            <a:extLst>
+              <a:ext uri="{FF2B5EF4-FFF2-40B4-BE49-F238E27FC236}">
+                <a16:creationId xmlns:a16="http://schemas.microsoft.com/office/drawing/2014/main" id="{7C392E25-2E9B-BC9F-AD43-59C290D43053}"/>
+              </a:ext>
+            </a:extLst>
+          </p:cNvPr>
+          <p:cNvPicPr>
+            <a:picLocks noChangeAspect="1"/>
+          </p:cNvPicPr>
+          <p:nvPr/>
+        </p:nvPicPr>
+        <p:blipFill>
+          <a:blip r:embed="rId3"/>
+          <a:stretch>
+            <a:fillRect/>
+          </a:stretch>
+        </p:blipFill>
+        <p:spPr>
+          <a:xfrm>
+            <a:off x="8212016" y="1576754"/>
+            <a:ext cx="3928868" cy="2749062"/>
+          </a:xfrm>
+          <a:prstGeom prst="rect">
+            <a:avLst/>
+          </a:prstGeom>
+        </p:spPr>
+      </p:pic>
+      <p:sp>
+        <p:nvSpPr>
+          <p:cNvPr id="8" name="ZoneTexte 7">
+            <a:extLst>
+              <a:ext uri="{FF2B5EF4-FFF2-40B4-BE49-F238E27FC236}">
+                <a16:creationId xmlns:a16="http://schemas.microsoft.com/office/drawing/2014/main" id="{CF626E05-75FB-750A-9577-B9ED95FF1815}"/>
+              </a:ext>
+            </a:extLst>
+          </p:cNvPr>
+          <p:cNvSpPr txBox="1"/>
+          <p:nvPr/>
+        </p:nvSpPr>
+        <p:spPr>
+          <a:xfrm>
+            <a:off x="855783" y="380131"/>
+            <a:ext cx="7514493" cy="283091"/>
+          </a:xfrm>
+          <a:prstGeom prst="rect">
+            <a:avLst/>
+          </a:prstGeom>
+          <a:noFill/>
+        </p:spPr>
+        <p:txBody>
+          <a:bodyPr wrap="square">
+            <a:spAutoFit/>
+          </a:bodyPr>
+          <a:lstStyle/>
+          <a:p>
+            <a:pPr>
+              <a:lnSpc>
+                <a:spcPts val="1350"/>
+              </a:lnSpc>
+            </a:pPr>
+            <a:r>
+              <a:rPr lang="fr-FR" sz="1600" b="1" dirty="0">
+                <a:solidFill>
+                  <a:srgbClr val="000080"/>
+                </a:solidFill>
+                <a:effectLst/>
+                <a:latin typeface="Menlo" panose="020B0609030804020204" pitchFamily="49" charset="0"/>
+              </a:rPr>
+              <a:t>**SLD012**</a:t>
+            </a:r>
+            <a:r>
+              <a:rPr lang="fr-FR" sz="1600" b="0" dirty="0">
+                <a:solidFill>
+                  <a:srgbClr val="000000"/>
+                </a:solidFill>
+                <a:effectLst/>
+                <a:latin typeface="Menlo" panose="020B0609030804020204" pitchFamily="49" charset="0"/>
+              </a:rPr>
+              <a:t>: </a:t>
+            </a:r>
+            <a:r>
+              <a:rPr lang="fr-FR" sz="1600" b="0" dirty="0" err="1">
+                <a:solidFill>
+                  <a:srgbClr val="000000"/>
+                </a:solidFill>
+                <a:effectLst/>
+                <a:latin typeface="Menlo" panose="020B0609030804020204" pitchFamily="49" charset="0"/>
+              </a:rPr>
+              <a:t>Average</a:t>
+            </a:r>
+            <a:r>
+              <a:rPr lang="fr-FR" sz="1600" b="0" dirty="0">
+                <a:solidFill>
+                  <a:srgbClr val="000000"/>
+                </a:solidFill>
+                <a:effectLst/>
+                <a:latin typeface="Menlo" panose="020B0609030804020204" pitchFamily="49" charset="0"/>
+              </a:rPr>
+              <a:t> </a:t>
+            </a:r>
+            <a:r>
+              <a:rPr lang="fr-FR" sz="1600" b="0" dirty="0" err="1">
+                <a:solidFill>
+                  <a:srgbClr val="000000"/>
+                </a:solidFill>
+                <a:effectLst/>
+                <a:latin typeface="Menlo" panose="020B0609030804020204" pitchFamily="49" charset="0"/>
+              </a:rPr>
+              <a:t>sleep</a:t>
+            </a:r>
+            <a:r>
+              <a:rPr lang="fr-FR" sz="1600" b="0" dirty="0">
+                <a:solidFill>
+                  <a:srgbClr val="000000"/>
+                </a:solidFill>
+                <a:effectLst/>
+                <a:latin typeface="Menlo" panose="020B0609030804020204" pitchFamily="49" charset="0"/>
+              </a:rPr>
+              <a:t> duration on </a:t>
+            </a:r>
+            <a:r>
+              <a:rPr lang="fr-FR" sz="1600" b="0" dirty="0" err="1">
+                <a:solidFill>
+                  <a:srgbClr val="000000"/>
+                </a:solidFill>
+                <a:effectLst/>
+                <a:latin typeface="Menlo" panose="020B0609030804020204" pitchFamily="49" charset="0"/>
+              </a:rPr>
+              <a:t>weekdays</a:t>
+            </a:r>
+            <a:r>
+              <a:rPr lang="fr-FR" sz="1600" b="0" dirty="0">
+                <a:solidFill>
+                  <a:srgbClr val="000000"/>
+                </a:solidFill>
+                <a:effectLst/>
+                <a:latin typeface="Menlo" panose="020B0609030804020204" pitchFamily="49" charset="0"/>
+              </a:rPr>
+              <a:t>.</a:t>
+            </a:r>
+          </a:p>
+        </p:txBody>
+      </p:sp>
+    </p:spTree>
+    <p:extLst>
+      <p:ext uri="{BB962C8B-B14F-4D97-AF65-F5344CB8AC3E}">
+        <p14:creationId xmlns:p14="http://schemas.microsoft.com/office/powerpoint/2010/main" val="3114666434"/>
+      </p:ext>
+    </p:extLst>
+  </p:cSld>
+  <p:clrMapOvr>
+    <a:masterClrMapping/>
+  </p:clrMapOvr>
+</p:sld>
+</file>
+
+<file path=ppt/slides/slide21.xml><?xml version="1.0" encoding="utf-8"?>
+<p:sld xmlns:a="http://schemas.openxmlformats.org/drawingml/2006/main" xmlns:r="http://schemas.openxmlformats.org/officeDocument/2006/relationships" xmlns:p="http://schemas.openxmlformats.org/presentationml/2006/main">
+  <p:cSld>
+    <p:spTree>
+      <p:nvGrpSpPr>
+        <p:cNvPr id="1" name=""/>
+        <p:cNvGrpSpPr/>
+        <p:nvPr/>
+      </p:nvGrpSpPr>
+      <p:grpSpPr>
+        <a:xfrm>
+          <a:off x="0" y="0"/>
+          <a:ext cx="0" cy="0"/>
+          <a:chOff x="0" y="0"/>
+          <a:chExt cx="0" cy="0"/>
+        </a:xfrm>
+      </p:grpSpPr>
+      <p:pic>
+        <p:nvPicPr>
+          <p:cNvPr id="3" name="Image 2" descr="Une image contenant texte, Police, capture d’écran&#10;&#10;Le contenu généré par l’IA peut être incorrect.">
+            <a:extLst>
+              <a:ext uri="{FF2B5EF4-FFF2-40B4-BE49-F238E27FC236}">
+                <a16:creationId xmlns:a16="http://schemas.microsoft.com/office/drawing/2014/main" id="{E0215DD5-9F49-190D-535D-6AC0C962422C}"/>
+              </a:ext>
+            </a:extLst>
+          </p:cNvPr>
+          <p:cNvPicPr>
+            <a:picLocks noChangeAspect="1"/>
+          </p:cNvPicPr>
+          <p:nvPr/>
+        </p:nvPicPr>
+        <p:blipFill>
+          <a:blip r:embed="rId2"/>
+          <a:stretch>
+            <a:fillRect/>
+          </a:stretch>
+        </p:blipFill>
+        <p:spPr>
+          <a:xfrm>
+            <a:off x="237880" y="2290884"/>
+            <a:ext cx="5745432" cy="1495669"/>
+          </a:xfrm>
+          <a:prstGeom prst="rect">
+            <a:avLst/>
+          </a:prstGeom>
+        </p:spPr>
+      </p:pic>
+      <p:pic>
+        <p:nvPicPr>
+          <p:cNvPr id="5" name="Image 4">
+            <a:extLst>
+              <a:ext uri="{FF2B5EF4-FFF2-40B4-BE49-F238E27FC236}">
+                <a16:creationId xmlns:a16="http://schemas.microsoft.com/office/drawing/2014/main" id="{28B1E8A8-90EA-6377-7F33-CDBC88C4529E}"/>
+              </a:ext>
+            </a:extLst>
+          </p:cNvPr>
+          <p:cNvPicPr>
+            <a:picLocks noChangeAspect="1"/>
+          </p:cNvPicPr>
+          <p:nvPr/>
+        </p:nvPicPr>
+        <p:blipFill>
+          <a:blip r:embed="rId3"/>
+          <a:stretch>
+            <a:fillRect/>
+          </a:stretch>
+        </p:blipFill>
+        <p:spPr>
+          <a:xfrm>
+            <a:off x="221507" y="958934"/>
+            <a:ext cx="11748985" cy="916757"/>
+          </a:xfrm>
+          <a:prstGeom prst="rect">
+            <a:avLst/>
+          </a:prstGeom>
+        </p:spPr>
+      </p:pic>
+      <p:pic>
+        <p:nvPicPr>
+          <p:cNvPr id="7" name="Image 6" descr="Une image contenant texte, capture d’écran, Police&#10;&#10;Le contenu généré par l’IA peut être incorrect.">
+            <a:extLst>
+              <a:ext uri="{FF2B5EF4-FFF2-40B4-BE49-F238E27FC236}">
+                <a16:creationId xmlns:a16="http://schemas.microsoft.com/office/drawing/2014/main" id="{0A2AD8BF-29E4-026E-C049-59C6536D20DD}"/>
+              </a:ext>
+            </a:extLst>
+          </p:cNvPr>
+          <p:cNvPicPr>
+            <a:picLocks noChangeAspect="1"/>
+          </p:cNvPicPr>
+          <p:nvPr/>
+        </p:nvPicPr>
+        <p:blipFill>
+          <a:blip r:embed="rId4"/>
+          <a:stretch>
+            <a:fillRect/>
+          </a:stretch>
+        </p:blipFill>
+        <p:spPr>
+          <a:xfrm>
+            <a:off x="6095999" y="2244882"/>
+            <a:ext cx="5348654" cy="1541671"/>
+          </a:xfrm>
+          <a:prstGeom prst="rect">
+            <a:avLst/>
+          </a:prstGeom>
+        </p:spPr>
+      </p:pic>
+      <p:pic>
+        <p:nvPicPr>
+          <p:cNvPr id="9" name="Image 8" descr="Une image contenant texte, Police, capture d’écran&#10;&#10;Le contenu généré par l’IA peut être incorrect.">
+            <a:extLst>
+              <a:ext uri="{FF2B5EF4-FFF2-40B4-BE49-F238E27FC236}">
+                <a16:creationId xmlns:a16="http://schemas.microsoft.com/office/drawing/2014/main" id="{A86EFB41-8745-A06D-691B-2B1C093C14A1}"/>
+              </a:ext>
+            </a:extLst>
+          </p:cNvPr>
+          <p:cNvPicPr>
+            <a:picLocks noChangeAspect="1"/>
+          </p:cNvPicPr>
+          <p:nvPr/>
+        </p:nvPicPr>
+        <p:blipFill>
+          <a:blip r:embed="rId5"/>
+          <a:stretch>
+            <a:fillRect/>
+          </a:stretch>
+        </p:blipFill>
+        <p:spPr>
+          <a:xfrm>
+            <a:off x="237880" y="4132788"/>
+            <a:ext cx="5685664" cy="1495669"/>
+          </a:xfrm>
+          <a:prstGeom prst="rect">
+            <a:avLst/>
+          </a:prstGeom>
+        </p:spPr>
+      </p:pic>
+      <p:pic>
+        <p:nvPicPr>
+          <p:cNvPr id="11" name="Image 10" descr="Une image contenant texte, Police, capture d’écran&#10;&#10;Le contenu généré par l’IA peut être incorrect.">
+            <a:extLst>
+              <a:ext uri="{FF2B5EF4-FFF2-40B4-BE49-F238E27FC236}">
+                <a16:creationId xmlns:a16="http://schemas.microsoft.com/office/drawing/2014/main" id="{F5E41A3B-0A44-94CE-7715-396717899D42}"/>
+              </a:ext>
+            </a:extLst>
+          </p:cNvPr>
+          <p:cNvPicPr>
+            <a:picLocks noChangeAspect="1"/>
+          </p:cNvPicPr>
+          <p:nvPr/>
+        </p:nvPicPr>
+        <p:blipFill>
+          <a:blip r:embed="rId6"/>
+          <a:stretch>
+            <a:fillRect/>
+          </a:stretch>
+        </p:blipFill>
+        <p:spPr>
+          <a:xfrm>
+            <a:off x="6095999" y="4132788"/>
+            <a:ext cx="5920910" cy="1541671"/>
+          </a:xfrm>
+          <a:prstGeom prst="rect">
+            <a:avLst/>
+          </a:prstGeom>
+        </p:spPr>
+      </p:pic>
+    </p:spTree>
+    <p:extLst>
+      <p:ext uri="{BB962C8B-B14F-4D97-AF65-F5344CB8AC3E}">
+        <p14:creationId xmlns:p14="http://schemas.microsoft.com/office/powerpoint/2010/main" val="2108621348"/>
+      </p:ext>
+    </p:extLst>
+  </p:cSld>
+  <p:clrMapOvr>
+    <a:masterClrMapping/>
+  </p:clrMapOvr>
+</p:sld>
+</file>
+
+<file path=ppt/slides/slide22.xml><?xml version="1.0" encoding="utf-8"?>
+<p:sld xmlns:a="http://schemas.openxmlformats.org/drawingml/2006/main" xmlns:r="http://schemas.openxmlformats.org/officeDocument/2006/relationships" xmlns:p="http://schemas.openxmlformats.org/presentationml/2006/main">
+  <p:cSld>
+    <p:spTree>
+      <p:nvGrpSpPr>
+        <p:cNvPr id="1" name=""/>
+        <p:cNvGrpSpPr/>
+        <p:nvPr/>
+      </p:nvGrpSpPr>
+      <p:grpSpPr>
+        <a:xfrm>
+          <a:off x="0" y="0"/>
+          <a:ext cx="0" cy="0"/>
+          <a:chOff x="0" y="0"/>
+          <a:chExt cx="0" cy="0"/>
+        </a:xfrm>
+      </p:grpSpPr>
+      <p:pic>
+        <p:nvPicPr>
+          <p:cNvPr id="3" name="Image 2">
+            <a:extLst>
+              <a:ext uri="{FF2B5EF4-FFF2-40B4-BE49-F238E27FC236}">
+                <a16:creationId xmlns:a16="http://schemas.microsoft.com/office/drawing/2014/main" id="{C6BD6835-4E13-4B02-64DC-21B3019C9694}"/>
+              </a:ext>
+            </a:extLst>
+          </p:cNvPr>
+          <p:cNvPicPr>
+            <a:picLocks noChangeAspect="1"/>
+          </p:cNvPicPr>
+          <p:nvPr/>
+        </p:nvPicPr>
+        <p:blipFill>
+          <a:blip r:embed="rId2"/>
+          <a:stretch>
+            <a:fillRect/>
+          </a:stretch>
+        </p:blipFill>
+        <p:spPr>
+          <a:xfrm>
+            <a:off x="105508" y="781051"/>
+            <a:ext cx="11605846" cy="989551"/>
+          </a:xfrm>
+          <a:prstGeom prst="rect">
+            <a:avLst/>
+          </a:prstGeom>
+        </p:spPr>
+      </p:pic>
+      <p:pic>
+        <p:nvPicPr>
+          <p:cNvPr id="5" name="Image 4" descr="Une image contenant texte, capture d’écran, Police&#10;&#10;Le contenu généré par l’IA peut être incorrect.">
+            <a:extLst>
+              <a:ext uri="{FF2B5EF4-FFF2-40B4-BE49-F238E27FC236}">
+                <a16:creationId xmlns:a16="http://schemas.microsoft.com/office/drawing/2014/main" id="{BFFA5B6D-600E-B2DF-828E-AD6FA4A33EC2}"/>
+              </a:ext>
+            </a:extLst>
+          </p:cNvPr>
+          <p:cNvPicPr>
+            <a:picLocks noChangeAspect="1"/>
+          </p:cNvPicPr>
+          <p:nvPr/>
+        </p:nvPicPr>
+        <p:blipFill>
+          <a:blip r:embed="rId3"/>
+          <a:stretch>
+            <a:fillRect/>
+          </a:stretch>
+        </p:blipFill>
+        <p:spPr>
+          <a:xfrm>
+            <a:off x="216404" y="1766240"/>
+            <a:ext cx="5065394" cy="1500136"/>
+          </a:xfrm>
+          <a:prstGeom prst="rect">
+            <a:avLst/>
+          </a:prstGeom>
+        </p:spPr>
+      </p:pic>
+      <p:pic>
+        <p:nvPicPr>
+          <p:cNvPr id="7" name="Image 6" descr="Une image contenant texte, capture d’écran, Police&#10;&#10;Le contenu généré par l’IA peut être incorrect.">
+            <a:extLst>
+              <a:ext uri="{FF2B5EF4-FFF2-40B4-BE49-F238E27FC236}">
+                <a16:creationId xmlns:a16="http://schemas.microsoft.com/office/drawing/2014/main" id="{1A8F4D92-62CA-3A22-C829-F753CC2FD848}"/>
+              </a:ext>
+            </a:extLst>
+          </p:cNvPr>
+          <p:cNvPicPr>
+            <a:picLocks noChangeAspect="1"/>
+          </p:cNvPicPr>
+          <p:nvPr/>
+        </p:nvPicPr>
+        <p:blipFill>
+          <a:blip r:embed="rId4"/>
+          <a:stretch>
+            <a:fillRect/>
+          </a:stretch>
+        </p:blipFill>
+        <p:spPr>
+          <a:xfrm>
+            <a:off x="5392693" y="1766240"/>
+            <a:ext cx="5747120" cy="1662759"/>
+          </a:xfrm>
+          <a:prstGeom prst="rect">
+            <a:avLst/>
+          </a:prstGeom>
+        </p:spPr>
+      </p:pic>
+      <p:pic>
+        <p:nvPicPr>
+          <p:cNvPr id="9" name="Image 8" descr="Une image contenant texte, Police, capture d’écran&#10;&#10;Le contenu généré par l’IA peut être incorrect.">
+            <a:extLst>
+              <a:ext uri="{FF2B5EF4-FFF2-40B4-BE49-F238E27FC236}">
+                <a16:creationId xmlns:a16="http://schemas.microsoft.com/office/drawing/2014/main" id="{E861C64B-D3A8-2331-6CD3-E7016E0E90B1}"/>
+              </a:ext>
+            </a:extLst>
+          </p:cNvPr>
+          <p:cNvPicPr>
+            <a:picLocks noChangeAspect="1"/>
+          </p:cNvPicPr>
+          <p:nvPr/>
+        </p:nvPicPr>
+        <p:blipFill>
+          <a:blip r:embed="rId5"/>
+          <a:stretch>
+            <a:fillRect/>
+          </a:stretch>
+        </p:blipFill>
+        <p:spPr>
+          <a:xfrm>
+            <a:off x="105508" y="3820747"/>
+            <a:ext cx="5176290" cy="1294073"/>
+          </a:xfrm>
+          <a:prstGeom prst="rect">
+            <a:avLst/>
+          </a:prstGeom>
+        </p:spPr>
+      </p:pic>
+      <p:pic>
+        <p:nvPicPr>
+          <p:cNvPr id="11" name="Image 10" descr="Une image contenant texte, Police, capture d’écran&#10;&#10;Le contenu généré par l’IA peut être incorrect.">
+            <a:extLst>
+              <a:ext uri="{FF2B5EF4-FFF2-40B4-BE49-F238E27FC236}">
+                <a16:creationId xmlns:a16="http://schemas.microsoft.com/office/drawing/2014/main" id="{E544CBBB-C85A-F35D-9452-5CF579FF632E}"/>
+              </a:ext>
+            </a:extLst>
+          </p:cNvPr>
+          <p:cNvPicPr>
+            <a:picLocks noChangeAspect="1"/>
+          </p:cNvPicPr>
+          <p:nvPr/>
+        </p:nvPicPr>
+        <p:blipFill>
+          <a:blip r:embed="rId6"/>
+          <a:stretch>
+            <a:fillRect/>
+          </a:stretch>
+        </p:blipFill>
+        <p:spPr>
+          <a:xfrm>
+            <a:off x="5281798" y="3627729"/>
+            <a:ext cx="6554648" cy="1662760"/>
+          </a:xfrm>
+          <a:prstGeom prst="rect">
+            <a:avLst/>
+          </a:prstGeom>
+        </p:spPr>
+      </p:pic>
+    </p:spTree>
+    <p:extLst>
+      <p:ext uri="{BB962C8B-B14F-4D97-AF65-F5344CB8AC3E}">
+        <p14:creationId xmlns:p14="http://schemas.microsoft.com/office/powerpoint/2010/main" val="2184476110"/>
+      </p:ext>
+    </p:extLst>
+  </p:cSld>
+  <p:clrMapOvr>
+    <a:masterClrMapping/>
+  </p:clrMapOvr>
+</p:sld>
+</file>
+
+<file path=ppt/slides/slide23.xml><?xml version="1.0" encoding="utf-8"?>
+<p:sld xmlns:a="http://schemas.openxmlformats.org/drawingml/2006/main" xmlns:r="http://schemas.openxmlformats.org/officeDocument/2006/relationships" xmlns:p="http://schemas.openxmlformats.org/presentationml/2006/main">
+  <p:cSld>
+    <p:spTree>
+      <p:nvGrpSpPr>
+        <p:cNvPr id="1" name="">
+          <a:extLst>
+            <a:ext uri="{FF2B5EF4-FFF2-40B4-BE49-F238E27FC236}">
+              <a16:creationId xmlns:a16="http://schemas.microsoft.com/office/drawing/2014/main" id="{A119E3D6-C9AF-F3ED-E175-52034D97CB13}"/>
+            </a:ext>
+          </a:extLst>
+        </p:cNvPr>
+        <p:cNvGrpSpPr/>
+        <p:nvPr/>
+      </p:nvGrpSpPr>
+      <p:grpSpPr>
+        <a:xfrm>
+          <a:off x="0" y="0"/>
+          <a:ext cx="0" cy="0"/>
+          <a:chOff x="0" y="0"/>
+          <a:chExt cx="0" cy="0"/>
+        </a:xfrm>
+      </p:grpSpPr>
+      <p:pic>
+        <p:nvPicPr>
+          <p:cNvPr id="3" name="Image 2">
+            <a:extLst>
+              <a:ext uri="{FF2B5EF4-FFF2-40B4-BE49-F238E27FC236}">
+                <a16:creationId xmlns:a16="http://schemas.microsoft.com/office/drawing/2014/main" id="{961CE511-8A19-E7AC-BA0D-EB091DFF8337}"/>
+              </a:ext>
+            </a:extLst>
+          </p:cNvPr>
+          <p:cNvPicPr>
+            <a:picLocks noChangeAspect="1"/>
+          </p:cNvPicPr>
+          <p:nvPr/>
+        </p:nvPicPr>
+        <p:blipFill>
+          <a:blip r:embed="rId2"/>
+          <a:stretch>
+            <a:fillRect/>
+          </a:stretch>
+        </p:blipFill>
+        <p:spPr>
+          <a:xfrm>
+            <a:off x="60488" y="763160"/>
+            <a:ext cx="12071023" cy="1053916"/>
+          </a:xfrm>
+          <a:prstGeom prst="rect">
+            <a:avLst/>
+          </a:prstGeom>
+        </p:spPr>
+      </p:pic>
+      <p:pic>
+        <p:nvPicPr>
+          <p:cNvPr id="4" name="Image 3" descr="Une image contenant texte, capture d’écran, logiciel&#10;&#10;Le contenu généré par l’IA peut être incorrect.">
+            <a:extLst>
+              <a:ext uri="{FF2B5EF4-FFF2-40B4-BE49-F238E27FC236}">
+                <a16:creationId xmlns:a16="http://schemas.microsoft.com/office/drawing/2014/main" id="{528A3C2A-708C-D9A7-EBA0-C8F898803D96}"/>
+              </a:ext>
+            </a:extLst>
+          </p:cNvPr>
+          <p:cNvPicPr>
+            <a:picLocks noChangeAspect="1"/>
+          </p:cNvPicPr>
+          <p:nvPr/>
+        </p:nvPicPr>
+        <p:blipFill>
+          <a:blip r:embed="rId3"/>
+          <a:stretch>
+            <a:fillRect/>
+          </a:stretch>
+        </p:blipFill>
+        <p:spPr>
+          <a:xfrm>
+            <a:off x="3178420" y="1290118"/>
+            <a:ext cx="4113335" cy="4952791"/>
+          </a:xfrm>
+          <a:prstGeom prst="rect">
+            <a:avLst/>
+          </a:prstGeom>
+        </p:spPr>
+      </p:pic>
+    </p:spTree>
+    <p:extLst>
+      <p:ext uri="{BB962C8B-B14F-4D97-AF65-F5344CB8AC3E}">
+        <p14:creationId xmlns:p14="http://schemas.microsoft.com/office/powerpoint/2010/main" val="3684735819"/>
+      </p:ext>
+    </p:extLst>
+  </p:cSld>
+  <p:clrMapOvr>
+    <a:masterClrMapping/>
+  </p:clrMapOvr>
+</p:sld>
+</file>
+
+<file path=ppt/slides/slide24.xml><?xml version="1.0" encoding="utf-8"?>
+<p:sld xmlns:a="http://schemas.openxmlformats.org/drawingml/2006/main" xmlns:r="http://schemas.openxmlformats.org/officeDocument/2006/relationships" xmlns:p="http://schemas.openxmlformats.org/presentationml/2006/main">
+  <p:cSld>
+    <p:spTree>
+      <p:nvGrpSpPr>
+        <p:cNvPr id="1" name=""/>
+        <p:cNvGrpSpPr/>
+        <p:nvPr/>
+      </p:nvGrpSpPr>
+      <p:grpSpPr>
+        <a:xfrm>
+          <a:off x="0" y="0"/>
+          <a:ext cx="0" cy="0"/>
+          <a:chOff x="0" y="0"/>
+          <a:chExt cx="0" cy="0"/>
+        </a:xfrm>
+      </p:grpSpPr>
+      <p:pic>
+        <p:nvPicPr>
+          <p:cNvPr id="3" name="Image 2">
+            <a:extLst>
+              <a:ext uri="{FF2B5EF4-FFF2-40B4-BE49-F238E27FC236}">
+                <a16:creationId xmlns:a16="http://schemas.microsoft.com/office/drawing/2014/main" id="{1D8CA4B1-D205-3BE7-54A1-188F29B642DA}"/>
+              </a:ext>
+            </a:extLst>
+          </p:cNvPr>
+          <p:cNvPicPr>
+            <a:picLocks noChangeAspect="1"/>
+          </p:cNvPicPr>
+          <p:nvPr/>
+        </p:nvPicPr>
+        <p:blipFill>
+          <a:blip r:embed="rId2"/>
+          <a:stretch>
+            <a:fillRect/>
+          </a:stretch>
+        </p:blipFill>
+        <p:spPr>
+          <a:xfrm>
+            <a:off x="60488" y="763160"/>
+            <a:ext cx="12071023" cy="1053916"/>
+          </a:xfrm>
+          <a:prstGeom prst="rect">
+            <a:avLst/>
+          </a:prstGeom>
+        </p:spPr>
+      </p:pic>
+      <p:pic>
+        <p:nvPicPr>
+          <p:cNvPr id="5" name="Image 4" descr="Une image contenant texte, Police, capture d’écran&#10;&#10;Le contenu généré par l’IA peut être incorrect.">
+            <a:extLst>
+              <a:ext uri="{FF2B5EF4-FFF2-40B4-BE49-F238E27FC236}">
+                <a16:creationId xmlns:a16="http://schemas.microsoft.com/office/drawing/2014/main" id="{53A68AC5-E037-0615-B620-09DE260C6C31}"/>
+              </a:ext>
+            </a:extLst>
+          </p:cNvPr>
+          <p:cNvPicPr>
+            <a:picLocks noChangeAspect="1"/>
+          </p:cNvPicPr>
+          <p:nvPr/>
+        </p:nvPicPr>
+        <p:blipFill>
+          <a:blip r:embed="rId3"/>
+          <a:stretch>
+            <a:fillRect/>
+          </a:stretch>
+        </p:blipFill>
+        <p:spPr>
+          <a:xfrm>
+            <a:off x="60488" y="1928446"/>
+            <a:ext cx="5174988" cy="1500554"/>
+          </a:xfrm>
+          <a:prstGeom prst="rect">
+            <a:avLst/>
+          </a:prstGeom>
+        </p:spPr>
+      </p:pic>
+      <p:pic>
+        <p:nvPicPr>
+          <p:cNvPr id="7" name="Image 6" descr="Une image contenant texte, Police, capture d’écran&#10;&#10;Le contenu généré par l’IA peut être incorrect.">
+            <a:extLst>
+              <a:ext uri="{FF2B5EF4-FFF2-40B4-BE49-F238E27FC236}">
+                <a16:creationId xmlns:a16="http://schemas.microsoft.com/office/drawing/2014/main" id="{112798A2-42A8-2904-CD59-CD7FA1AE2459}"/>
+              </a:ext>
+            </a:extLst>
+          </p:cNvPr>
+          <p:cNvPicPr>
+            <a:picLocks noChangeAspect="1"/>
+          </p:cNvPicPr>
+          <p:nvPr/>
+        </p:nvPicPr>
+        <p:blipFill>
+          <a:blip r:embed="rId4"/>
+          <a:stretch>
+            <a:fillRect/>
+          </a:stretch>
+        </p:blipFill>
+        <p:spPr>
+          <a:xfrm>
+            <a:off x="5662246" y="1817076"/>
+            <a:ext cx="5274408" cy="1534540"/>
+          </a:xfrm>
+          <a:prstGeom prst="rect">
+            <a:avLst/>
+          </a:prstGeom>
+        </p:spPr>
+      </p:pic>
+      <p:pic>
+        <p:nvPicPr>
+          <p:cNvPr id="9" name="Image 8" descr="Une image contenant texte, Police, capture d’écran&#10;&#10;Le contenu généré par l’IA peut être incorrect.">
+            <a:extLst>
+              <a:ext uri="{FF2B5EF4-FFF2-40B4-BE49-F238E27FC236}">
+                <a16:creationId xmlns:a16="http://schemas.microsoft.com/office/drawing/2014/main" id="{08263EA4-8536-F6A3-9F2C-572F17B45B55}"/>
+              </a:ext>
+            </a:extLst>
+          </p:cNvPr>
+          <p:cNvPicPr>
+            <a:picLocks noChangeAspect="1"/>
+          </p:cNvPicPr>
+          <p:nvPr/>
+        </p:nvPicPr>
+        <p:blipFill>
+          <a:blip r:embed="rId5"/>
+          <a:stretch>
+            <a:fillRect/>
+          </a:stretch>
+        </p:blipFill>
+        <p:spPr>
+          <a:xfrm>
+            <a:off x="0" y="3696677"/>
+            <a:ext cx="5556105" cy="1500554"/>
+          </a:xfrm>
+          <a:prstGeom prst="rect">
+            <a:avLst/>
+          </a:prstGeom>
+        </p:spPr>
+      </p:pic>
+      <p:pic>
+        <p:nvPicPr>
+          <p:cNvPr id="11" name="Image 10" descr="Une image contenant texte, Police, capture d’écran&#10;&#10;Le contenu généré par l’IA peut être incorrect.">
+            <a:extLst>
+              <a:ext uri="{FF2B5EF4-FFF2-40B4-BE49-F238E27FC236}">
+                <a16:creationId xmlns:a16="http://schemas.microsoft.com/office/drawing/2014/main" id="{9F1D740C-B0B0-33EC-99B3-6EA999B6DB14}"/>
+              </a:ext>
+            </a:extLst>
+          </p:cNvPr>
+          <p:cNvPicPr>
+            <a:picLocks noChangeAspect="1"/>
+          </p:cNvPicPr>
+          <p:nvPr/>
+        </p:nvPicPr>
+        <p:blipFill>
+          <a:blip r:embed="rId6"/>
+          <a:stretch>
+            <a:fillRect/>
+          </a:stretch>
+        </p:blipFill>
+        <p:spPr>
+          <a:xfrm>
+            <a:off x="5662246" y="3649741"/>
+            <a:ext cx="5638800" cy="1547490"/>
+          </a:xfrm>
+          <a:prstGeom prst="rect">
+            <a:avLst/>
+          </a:prstGeom>
+        </p:spPr>
+      </p:pic>
+    </p:spTree>
+    <p:extLst>
+      <p:ext uri="{BB962C8B-B14F-4D97-AF65-F5344CB8AC3E}">
+        <p14:creationId xmlns:p14="http://schemas.microsoft.com/office/powerpoint/2010/main" val="3271076423"/>
+      </p:ext>
+    </p:extLst>
+  </p:cSld>
+  <p:clrMapOvr>
+    <a:masterClrMapping/>
+  </p:clrMapOvr>
+</p:sld>
+</file>
+
+<file path=ppt/slides/slide25.xml><?xml version="1.0" encoding="utf-8"?>
+<p:sld xmlns:a="http://schemas.openxmlformats.org/drawingml/2006/main" xmlns:r="http://schemas.openxmlformats.org/officeDocument/2006/relationships" xmlns:p="http://schemas.openxmlformats.org/presentationml/2006/main">
+  <p:cSld>
+    <p:spTree>
+      <p:nvGrpSpPr>
+        <p:cNvPr id="1" name=""/>
+        <p:cNvGrpSpPr/>
+        <p:nvPr/>
+      </p:nvGrpSpPr>
+      <p:grpSpPr>
+        <a:xfrm>
+          <a:off x="0" y="0"/>
+          <a:ext cx="0" cy="0"/>
+          <a:chOff x="0" y="0"/>
+          <a:chExt cx="0" cy="0"/>
+        </a:xfrm>
+      </p:grpSpPr>
+    </p:spTree>
+    <p:extLst>
+      <p:ext uri="{BB962C8B-B14F-4D97-AF65-F5344CB8AC3E}">
+        <p14:creationId xmlns:p14="http://schemas.microsoft.com/office/powerpoint/2010/main" val="117116669"/>
       </p:ext>
     </p:extLst>
   </p:cSld>
